--- a/ppt/out/课程设计_验收答辩.pptx
+++ b/ppt/out/课程设计_验收答辩.pptx
@@ -540,12 +540,6 @@
               <a:t>时间：约 0.3 分钟。</a:t>
             </a:r>
           </a:p>
-          <a:p/>
-          <a:p>
-            <a:r>
-              <a:t>---</a:t>
-            </a:r>
-          </a:p>
         </p:txBody>
       </p:sp>
       <p:sp>
@@ -616,12 +610,6 @@
               <a:t>时间：约 0.9 分钟。</a:t>
             </a:r>
           </a:p>
-          <a:p/>
-          <a:p>
-            <a:r>
-              <a:t>---</a:t>
-            </a:r>
-          </a:p>
         </p:txBody>
       </p:sp>
       <p:sp>
@@ -692,12 +680,6 @@
               <a:t>时间：约 0.6 分钟。图：前递优先级波形。</a:t>
             </a:r>
           </a:p>
-          <a:p/>
-          <a:p>
-            <a:r>
-              <a:t>---</a:t>
-            </a:r>
-          </a:p>
         </p:txBody>
       </p:sp>
       <p:sp>
@@ -768,12 +750,6 @@
               <a:t>时间：约 0.6 分钟。图：load-use 冻结波形。</a:t>
             </a:r>
           </a:p>
-          <a:p/>
-          <a:p>
-            <a:r>
-              <a:t>---</a:t>
-            </a:r>
-          </a:p>
         </p:txBody>
       </p:sp>
       <p:sp>
@@ -844,12 +820,6 @@
               <a:t>时间：约 0.6 分钟。图：分支冲刷波形。</a:t>
             </a:r>
           </a:p>
-          <a:p/>
-          <a:p>
-            <a:r>
-              <a:t>---</a:t>
-            </a:r>
-          </a:p>
         </p:txBody>
       </p:sp>
       <p:sp>
@@ -920,12 +890,6 @@
               <a:t>时间：约 0.3 分钟。图：五级流水线运行总览波形。</a:t>
             </a:r>
           </a:p>
-          <a:p/>
-          <a:p>
-            <a:r>
-              <a:t>---</a:t>
-            </a:r>
-          </a:p>
         </p:txBody>
       </p:sp>
       <p:sp>
@@ -996,12 +960,6 @@
               <a:t>时间：约 0.1 分钟。</a:t>
             </a:r>
           </a:p>
-          <a:p/>
-          <a:p>
-            <a:r>
-              <a:t>---</a:t>
-            </a:r>
-          </a:p>
         </p:txBody>
       </p:sp>
       <p:sp>
@@ -1072,12 +1030,6 @@
               <a:t>时间：约 0.5 分钟。图：8N1 帧时序图。</a:t>
             </a:r>
           </a:p>
-          <a:p/>
-          <a:p>
-            <a:r>
-              <a:t>---</a:t>
-            </a:r>
-          </a:p>
         </p:txBody>
       </p:sp>
       <p:sp>
@@ -1148,12 +1100,6 @@
               <a:t>时间：约 0.5 分钟。图：发送与接收状态机。</a:t>
             </a:r>
           </a:p>
-          <a:p/>
-          <a:p>
-            <a:r>
-              <a:t>---</a:t>
-            </a:r>
-          </a:p>
         </p:txBody>
       </p:sp>
       <p:sp>
@@ -1224,12 +1170,6 @@
               <a:t>时间：约 0.6 分钟。</a:t>
             </a:r>
           </a:p>
-          <a:p/>
-          <a:p>
-            <a:r>
-              <a:t>---</a:t>
-            </a:r>
-          </a:p>
         </p:txBody>
       </p:sp>
       <p:sp>
@@ -1300,12 +1240,6 @@
               <a:t>时间：约 0.7 分钟。图：地址空间映射图。</a:t>
             </a:r>
           </a:p>
-          <a:p/>
-          <a:p>
-            <a:r>
-              <a:t>---</a:t>
-            </a:r>
-          </a:p>
         </p:txBody>
       </p:sp>
       <p:sp>
@@ -1376,12 +1310,6 @@
               <a:t>时间：约 0.1 分钟。</a:t>
             </a:r>
           </a:p>
-          <a:p/>
-          <a:p>
-            <a:r>
-              <a:t>---</a:t>
-            </a:r>
-          </a:p>
         </p:txBody>
       </p:sp>
       <p:sp>
@@ -1452,12 +1380,6 @@
               <a:t>时间：约 0.5 分钟。图：发送忙碌状态时序图。</a:t>
             </a:r>
           </a:p>
-          <a:p/>
-          <a:p>
-            <a:r>
-              <a:t>---</a:t>
-            </a:r>
-          </a:p>
         </p:txBody>
       </p:sp>
       <p:sp>
@@ -1528,12 +1450,6 @@
               <a:t>时间：约 0.1 分钟。</a:t>
             </a:r>
           </a:p>
-          <a:p/>
-          <a:p>
-            <a:r>
-              <a:t>---</a:t>
-            </a:r>
-          </a:p>
         </p:txBody>
       </p:sp>
       <p:sp>
@@ -1604,12 +1520,6 @@
               <a:t>时间：约 0.7 分钟。图：SoC 装配结构图。</a:t>
             </a:r>
           </a:p>
-          <a:p/>
-          <a:p>
-            <a:r>
-              <a:t>---</a:t>
-            </a:r>
-          </a:p>
         </p:txBody>
       </p:sp>
       <p:sp>
@@ -1680,12 +1590,6 @@
               <a:t>时间：约 0.4 分钟。图：复位同步时序图。</a:t>
             </a:r>
           </a:p>
-          <a:p/>
-          <a:p>
-            <a:r>
-              <a:t>---</a:t>
-            </a:r>
-          </a:p>
         </p:txBody>
       </p:sp>
       <p:sp>
@@ -1756,12 +1660,6 @@
               <a:t>时间：约 0.3 分钟。图：板级引脚图。</a:t>
             </a:r>
           </a:p>
-          <a:p/>
-          <a:p>
-            <a:r>
-              <a:t>---</a:t>
-            </a:r>
-          </a:p>
         </p:txBody>
       </p:sp>
       <p:sp>
@@ -1832,12 +1730,6 @@
               <a:t>时间：约 0.6 分钟。图：console 流程图。</a:t>
             </a:r>
           </a:p>
-          <a:p/>
-          <a:p>
-            <a:r>
-              <a:t>---</a:t>
-            </a:r>
-          </a:p>
         </p:txBody>
       </p:sp>
       <p:sp>
@@ -1908,12 +1800,6 @@
               <a:t>时间：约 0.4 分钟。图：构建与烧录流程图。</a:t>
             </a:r>
           </a:p>
-          <a:p/>
-          <a:p>
-            <a:r>
-              <a:t>---</a:t>
-            </a:r>
-          </a:p>
         </p:txBody>
       </p:sp>
       <p:sp>
@@ -1984,12 +1870,6 @@
               <a:t>时间：约 0.1 分钟。</a:t>
             </a:r>
           </a:p>
-          <a:p/>
-          <a:p>
-            <a:r>
-              <a:t>---</a:t>
-            </a:r>
-          </a:p>
         </p:txBody>
       </p:sp>
       <p:sp>
@@ -2060,12 +1940,6 @@
               <a:t>时间：约 0.9 分钟。图：三层验证结构图。</a:t>
             </a:r>
           </a:p>
-          <a:p/>
-          <a:p>
-            <a:r>
-              <a:t>---</a:t>
-            </a:r>
-          </a:p>
         </p:txBody>
       </p:sp>
       <p:sp>
@@ -2136,12 +2010,6 @@
               <a:t>时间：约 0.3 分钟。</a:t>
             </a:r>
           </a:p>
-          <a:p/>
-          <a:p>
-            <a:r>
-              <a:t>---</a:t>
-            </a:r>
-          </a:p>
         </p:txBody>
       </p:sp>
       <p:sp>
@@ -2212,12 +2080,6 @@
               <a:t>时间：约 0.5 分钟。图：三层结构框图。</a:t>
             </a:r>
           </a:p>
-          <a:p/>
-          <a:p>
-            <a:r>
-              <a:t>---</a:t>
-            </a:r>
-          </a:p>
         </p:txBody>
       </p:sp>
       <p:sp>
@@ -2288,12 +2150,6 @@
               <a:t>时间：约 0.8 分钟。</a:t>
             </a:r>
           </a:p>
-          <a:p/>
-          <a:p>
-            <a:r>
-              <a:t>---</a:t>
-            </a:r>
-          </a:p>
         </p:txBody>
       </p:sp>
       <p:sp>
@@ -2364,12 +2220,6 @@
               <a:t>时间：约 0.8 分钟。数据来源：pipeline/doc/perf_report.md 第 2.2 节。</a:t>
             </a:r>
           </a:p>
-          <a:p/>
-          <a:p>
-            <a:r>
-              <a:t>---</a:t>
-            </a:r>
-          </a:p>
         </p:txBody>
       </p:sp>
       <p:sp>
@@ -2440,12 +2290,6 @@
               <a:t>时间：约 0.9 分钟。数据来源：pipeline/doc/perf_report.md 第 3、4 节。</a:t>
             </a:r>
           </a:p>
-          <a:p/>
-          <a:p>
-            <a:r>
-              <a:t>---</a:t>
-            </a:r>
-          </a:p>
         </p:txBody>
       </p:sp>
       <p:sp>
@@ -2516,12 +2360,6 @@
               <a:t>时间：约 0.1 分钟。</a:t>
             </a:r>
           </a:p>
-          <a:p/>
-          <a:p>
-            <a:r>
-              <a:t>---</a:t>
-            </a:r>
-          </a:p>
         </p:txBody>
       </p:sp>
       <p:sp>
@@ -2592,12 +2430,6 @@
               <a:t>时间：约 0.8 分钟。图：终端日志截图（待补充）。演示前确认串口与板卡连接。</a:t>
             </a:r>
           </a:p>
-          <a:p/>
-          <a:p>
-            <a:r>
-              <a:t>---</a:t>
-            </a:r>
-          </a:p>
         </p:txBody>
       </p:sp>
       <p:sp>
@@ -2668,12 +2500,6 @@
               <a:t>时间：约 0.1 分钟。</a:t>
             </a:r>
           </a:p>
-          <a:p/>
-          <a:p>
-            <a:r>
-              <a:t>---</a:t>
-            </a:r>
-          </a:p>
         </p:txBody>
       </p:sp>
       <p:sp>
@@ -2814,12 +2640,6 @@
               <a:t>时间：约 0.4 分钟。</a:t>
             </a:r>
           </a:p>
-          <a:p/>
-          <a:p>
-            <a:r>
-              <a:t>---</a:t>
-            </a:r>
-          </a:p>
         </p:txBody>
       </p:sp>
       <p:sp>
@@ -2890,12 +2710,6 @@
               <a:t>时间：约 0.5 分钟。图：目录层次图。</a:t>
             </a:r>
           </a:p>
-          <a:p/>
-          <a:p>
-            <a:r>
-              <a:t>---</a:t>
-            </a:r>
-          </a:p>
         </p:txBody>
       </p:sp>
       <p:sp>
@@ -2966,12 +2780,6 @@
               <a:t>时间：约 0.3 分钟。姓名与分工待补充。</a:t>
             </a:r>
           </a:p>
-          <a:p/>
-          <a:p>
-            <a:r>
-              <a:t>---</a:t>
-            </a:r>
-          </a:p>
         </p:txBody>
       </p:sp>
       <p:sp>
@@ -3042,12 +2850,6 @@
               <a:t>时间：约 0.1 分钟。</a:t>
             </a:r>
           </a:p>
-          <a:p/>
-          <a:p>
-            <a:r>
-              <a:t>---</a:t>
-            </a:r>
-          </a:p>
         </p:txBody>
       </p:sp>
       <p:sp>
@@ -3118,12 +2920,6 @@
               <a:t>时间：约 0.7 分钟。图：五级流水线结构框图。</a:t>
             </a:r>
           </a:p>
-          <a:p/>
-          <a:p>
-            <a:r>
-              <a:t>---</a:t>
-            </a:r>
-          </a:p>
         </p:txBody>
       </p:sp>
       <p:sp>
@@ -3192,12 +2988,6 @@
           <a:p>
             <a:r>
               <a:t>时间：约 0.7 分钟。图：指令类别条数柱状图。</a:t>
-            </a:r>
-          </a:p>
-          <a:p/>
-          <a:p>
-            <a:r>
-              <a:t>---</a:t>
             </a:r>
           </a:p>
         </p:txBody>
@@ -13637,7 +13427,7 @@
         <p:spPr>
           <a:xfrm>
             <a:off x="566928" y="1243584"/>
-            <a:ext cx="11057839" cy="2699003"/>
+            <a:ext cx="11057839" cy="2753868"/>
           </a:xfrm>
           <a:prstGeom prst="rect">
             <a:avLst/>
@@ -13772,7 +13562,28 @@
                 <a:ea typeface="Microsoft YaHei"/>
                 <a:cs typeface="Microsoft YaHei"/>
               </a:rPr>
-              <a:t>每档数据满足恒等式 C_total 等于 IC 加 F 减 1 加 L 加 2T，其中 L 是 load-use 冻结周期数，T 是跳转成立次数。</a:t>
+              <a:t>每档数据满足恒等式 C_total 等于 IC 加 F 减 1 加 L 加 2T。</a:t>
+            </a:r>
+          </a:p>
+          <a:p>
+            <a:pPr>
+              <a:lnSpc>
+                <a:spcPct val="130000"/>
+              </a:lnSpc>
+              <a:spcAft>
+                <a:spcPts val="500"/>
+              </a:spcAft>
+            </a:pPr>
+            <a:r>
+              <a:rPr sz="1600" b="0">
+                <a:solidFill>
+                  <a:srgbClr val="222222"/>
+                </a:solidFill>
+                <a:latin typeface="Microsoft YaHei"/>
+                <a:ea typeface="Microsoft YaHei"/>
+                <a:cs typeface="Microsoft YaHei"/>
+              </a:rPr>
+              <a:t>其中 F 是首个真实 EX 槽的沿号，本次测量为 1。L 是 load-use 冻结周期数，T 是跳转成立次数。</a:t>
             </a:r>
           </a:p>
         </p:txBody>

--- a/ppt/out/课程设计_验收答辩.pptx
+++ b/ppt/out/课程设计_验收答辩.pptx
@@ -1027,7 +1027,7 @@
           <a:lstStyle/>
           <a:p>
             <a:r>
-              <a:t>时间：约 0.5 分钟。图：8N1 帧时序图。</a:t>
+              <a:t>时间：约 0.5 分钟。图：8N1 帧时序图与实测波形。</a:t>
             </a:r>
           </a:p>
         </p:txBody>
@@ -1237,7 +1237,7 @@
           <a:lstStyle/>
           <a:p>
             <a:r>
-              <a:t>时间：约 0.7 分钟。图：地址空间映射图。</a:t>
+              <a:t>时间：约 0.7 分钟。图：统一编址访问波形。</a:t>
             </a:r>
           </a:p>
         </p:txBody>
@@ -1377,7 +1377,7 @@
           <a:lstStyle/>
           <a:p>
             <a:r>
-              <a:t>时间：约 0.5 分钟。图：发送忙碌状态时序图。</a:t>
+              <a:t>时间：约 0.5 分钟。图：忙写丢弃波形。</a:t>
             </a:r>
           </a:p>
         </p:txBody>
@@ -2427,7 +2427,7 @@
           <a:lstStyle/>
           <a:p>
             <a:r>
-              <a:t>时间：约 0.8 分钟。图：终端日志截图（待补充）。演示前确认串口与板卡连接。</a:t>
+              <a:t>时间：约 0.8 分钟。图：下板演示实拍（终端 banner 与回显）。演示前确认串口与板卡连接。</a:t>
             </a:r>
           </a:p>
         </p:txBody>
@@ -2777,7 +2777,7 @@
           <a:lstStyle/>
           <a:p>
             <a:r>
-              <a:t>时间：约 0.3 分钟。姓名与分工待补充。</a:t>
+              <a:t>时间：约 0.3 分钟。</a:t>
             </a:r>
           </a:p>
         </p:txBody>
@@ -6164,7 +6164,51 @@
                 <a:ea typeface="Microsoft YaHei"/>
                 <a:cs typeface="Microsoft YaHei"/>
               </a:rPr>
-              <a:t>组员：待补充</a:t>
+              <a:t>组员：柯宁皓、陈霆钧、伍奕涛、陈乔</a:t>
+            </a:r>
+          </a:p>
+        </p:txBody>
+      </p:sp>
+      <p:sp>
+        <p:nvSpPr>
+          <p:cNvPr id="6" name="TextBox 5"/>
+          <p:cNvSpPr txBox="1"/>
+          <p:nvPr/>
+        </p:nvSpPr>
+        <p:spPr>
+          <a:xfrm>
+            <a:off x="566928" y="3703320"/>
+            <a:ext cx="11057839" cy="457200"/>
+          </a:xfrm>
+          <a:prstGeom prst="rect">
+            <a:avLst/>
+          </a:prstGeom>
+          <a:noFill/>
+        </p:spPr>
+        <p:txBody>
+          <a:bodyPr wrap="square" lIns="0" rIns="0" tIns="0" bIns="0" anchor="t">
+            <a:spAutoFit/>
+          </a:bodyPr>
+          <a:lstStyle/>
+          <a:p>
+            <a:pPr algn="l">
+              <a:lnSpc>
+                <a:spcPct val="130000"/>
+              </a:lnSpc>
+              <a:spcAft>
+                <a:spcPts val="0"/>
+              </a:spcAft>
+            </a:pPr>
+            <a:r>
+              <a:rPr sz="1500" b="0">
+                <a:solidFill>
+                  <a:srgbClr val="222222"/>
+                </a:solidFill>
+                <a:latin typeface="Microsoft YaHei"/>
+                <a:ea typeface="Microsoft YaHei"/>
+                <a:cs typeface="Microsoft YaHei"/>
+              </a:rPr>
+              <a:t>2026 年 9 月 18 日</a:t>
             </a:r>
           </a:p>
         </p:txBody>
@@ -8192,7 +8236,7 @@
         <p:spPr>
           <a:xfrm>
             <a:off x="566928" y="1243584"/>
-            <a:ext cx="11057839" cy="1607820"/>
+            <a:ext cx="5943600" cy="2729483"/>
           </a:xfrm>
           <a:prstGeom prst="rect">
             <a:avLst/>
@@ -8309,11 +8353,32 @@
               <a:t>位节拍由 clk_en 分频脉冲产生，整机使用单一时钟，没有第二个时钟域。</a:t>
             </a:r>
           </a:p>
+          <a:p>
+            <a:pPr>
+              <a:lnSpc>
+                <a:spcPct val="130000"/>
+              </a:lnSpc>
+              <a:spcAft>
+                <a:spcPts val="500"/>
+              </a:spcAft>
+            </a:pPr>
+            <a:r>
+              <a:rPr sz="1400" b="0">
+                <a:solidFill>
+                  <a:srgbClr val="222222"/>
+                </a:solidFill>
+                <a:latin typeface="Microsoft YaHei"/>
+                <a:ea typeface="Microsoft YaHei"/>
+                <a:cs typeface="Microsoft YaHei"/>
+              </a:rPr>
+              <a:t>波形中一帧由起始位、八位数据与停止位组成，帧内跳变落在整数比特边界。</a:t>
+            </a:r>
+          </a:p>
         </p:txBody>
       </p:sp>
       <p:pic>
         <p:nvPicPr>
-          <p:cNvPr id="5" name="Picture 4" descr="uart-frame.png"/>
+          <p:cNvPr id="5" name="Picture 4" descr="1_frame868_20260915.png"/>
           <p:cNvPicPr>
             <a:picLocks noChangeAspect="1"/>
           </p:cNvPicPr>
@@ -8327,17 +8392,41 @@
         </p:blipFill>
         <p:spPr>
           <a:xfrm>
-            <a:off x="570349" y="3337560"/>
-            <a:ext cx="11050996" cy="3081528"/>
+            <a:off x="6909080" y="1243584"/>
+            <a:ext cx="4591455" cy="2697480"/>
           </a:xfrm>
           <a:prstGeom prst="rect">
             <a:avLst/>
           </a:prstGeom>
         </p:spPr>
       </p:pic>
-      <p:sp>
-        <p:nvSpPr>
-          <p:cNvPr id="6" name="TextBox 5"/>
+      <p:pic>
+        <p:nvPicPr>
+          <p:cNvPr id="6" name="Picture 5" descr="uart-frame.png"/>
+          <p:cNvPicPr>
+            <a:picLocks noChangeAspect="1"/>
+          </p:cNvPicPr>
+          <p:nvPr/>
+        </p:nvPicPr>
+        <p:blipFill>
+          <a:blip r:embed="rId3"/>
+          <a:stretch>
+            <a:fillRect/>
+          </a:stretch>
+        </p:blipFill>
+        <p:spPr>
+          <a:xfrm>
+            <a:off x="1800059" y="4023360"/>
+            <a:ext cx="8591576" cy="2395728"/>
+          </a:xfrm>
+          <a:prstGeom prst="rect">
+            <a:avLst/>
+          </a:prstGeom>
+        </p:spPr>
+      </p:pic>
+      <p:sp>
+        <p:nvSpPr>
+          <p:cNvPr id="7" name="TextBox 6"/>
           <p:cNvSpPr txBox="1"/>
           <p:nvPr/>
         </p:nvSpPr>
@@ -8381,7 +8470,7 @@
       </p:sp>
       <p:sp>
         <p:nvSpPr>
-          <p:cNvPr id="7" name="TextBox 6"/>
+          <p:cNvPr id="8" name="TextBox 7"/>
           <p:cNvSpPr txBox="1"/>
           <p:nvPr/>
         </p:nvSpPr>
@@ -9757,7 +9846,7 @@
         <p:spPr>
           <a:xfrm>
             <a:off x="566928" y="1243584"/>
-            <a:ext cx="6309360" cy="3186684"/>
+            <a:ext cx="5943600" cy="3051048"/>
           </a:xfrm>
           <a:prstGeom prst="rect">
             <a:avLst/>
@@ -9779,7 +9868,7 @@
               </a:spcAft>
             </a:pPr>
             <a:r>
-              <a:rPr sz="1500" b="0">
+              <a:rPr sz="1400" b="0">
                 <a:solidFill>
                   <a:srgbClr val="222222"/>
                 </a:solidFill>
@@ -9800,7 +9889,7 @@
               </a:spcAft>
             </a:pPr>
             <a:r>
-              <a:rPr sz="1500" b="0">
+              <a:rPr sz="1400" b="0">
                 <a:solidFill>
                   <a:srgbClr val="222222"/>
                 </a:solidFill>
@@ -9821,7 +9910,7 @@
               </a:spcAft>
             </a:pPr>
             <a:r>
-              <a:rPr sz="1500" b="0">
+              <a:rPr sz="1400" b="0">
                 <a:solidFill>
                   <a:srgbClr val="222222"/>
                 </a:solidFill>
@@ -9842,7 +9931,7 @@
               </a:spcAft>
             </a:pPr>
             <a:r>
-              <a:rPr sz="1500" b="0">
+              <a:rPr sz="1400" b="0">
                 <a:solidFill>
                   <a:srgbClr val="222222"/>
                 </a:solidFill>
@@ -9863,7 +9952,7 @@
               </a:spcAft>
             </a:pPr>
             <a:r>
-              <a:rPr sz="1500" b="0">
+              <a:rPr sz="1400" b="0">
                 <a:solidFill>
                   <a:srgbClr val="222222"/>
                 </a:solidFill>
@@ -9884,7 +9973,7 @@
               </a:spcAft>
             </a:pPr>
             <a:r>
-              <a:rPr sz="1500" b="0">
+              <a:rPr sz="1400" b="0">
                 <a:solidFill>
                   <a:srgbClr val="222222"/>
                 </a:solidFill>
@@ -9893,13 +9982,34 @@
                 <a:cs typeface="Microsoft YaHei"/>
               </a:rPr>
               <a:t>外设访问与数据存储器访问在同一拍完成，不插入等待周期。</a:t>
+            </a:r>
+          </a:p>
+          <a:p>
+            <a:pPr>
+              <a:lnSpc>
+                <a:spcPct val="130000"/>
+              </a:lnSpc>
+              <a:spcAft>
+                <a:spcPts val="500"/>
+              </a:spcAft>
+            </a:pPr>
+            <a:r>
+              <a:rPr sz="1400" b="0">
+                <a:solidFill>
+                  <a:srgbClr val="222222"/>
+                </a:solidFill>
+                <a:latin typeface="Microsoft YaHei"/>
+                <a:ea typeface="Microsoft YaHei"/>
+                <a:cs typeface="Microsoft YaHei"/>
+              </a:rPr>
+              <a:t>波形中写发送与读接收在同一窗口完成，回显帧与注入字节一致。</a:t>
             </a:r>
           </a:p>
         </p:txBody>
       </p:sp>
       <p:pic>
         <p:nvPicPr>
-          <p:cNvPr id="5" name="Picture 4" descr="diagram-addr-map.png"/>
+          <p:cNvPr id="5" name="Picture 4" descr="4e_full_chain_overview_20260915.png"/>
           <p:cNvPicPr>
             <a:picLocks noChangeAspect="1"/>
           </p:cNvPicPr>
@@ -9913,17 +10023,41 @@
         </p:blipFill>
         <p:spPr>
           <a:xfrm>
-            <a:off x="7151979" y="1335024"/>
-            <a:ext cx="4471416" cy="4992624"/>
+            <a:off x="6909080" y="1243584"/>
+            <a:ext cx="4591455" cy="2697480"/>
           </a:xfrm>
           <a:prstGeom prst="rect">
             <a:avLst/>
           </a:prstGeom>
         </p:spPr>
       </p:pic>
-      <p:sp>
-        <p:nvSpPr>
-          <p:cNvPr id="6" name="TextBox 5"/>
+      <p:pic>
+        <p:nvPicPr>
+          <p:cNvPr id="6" name="Picture 5" descr="exp2-mmio.png"/>
+          <p:cNvPicPr>
+            <a:picLocks noChangeAspect="1"/>
+          </p:cNvPicPr>
+          <p:nvPr/>
+        </p:nvPicPr>
+        <p:blipFill>
+          <a:blip r:embed="rId3"/>
+          <a:stretch>
+            <a:fillRect/>
+          </a:stretch>
+        </p:blipFill>
+        <p:spPr>
+          <a:xfrm>
+            <a:off x="568299" y="4023360"/>
+            <a:ext cx="11055096" cy="2395728"/>
+          </a:xfrm>
+          <a:prstGeom prst="rect">
+            <a:avLst/>
+          </a:prstGeom>
+        </p:spPr>
+      </p:pic>
+      <p:sp>
+        <p:nvSpPr>
+          <p:cNvPr id="7" name="TextBox 6"/>
           <p:cNvSpPr txBox="1"/>
           <p:nvPr/>
         </p:nvSpPr>
@@ -9967,7 +10101,7 @@
       </p:sp>
       <p:sp>
         <p:nvSpPr>
-          <p:cNvPr id="7" name="TextBox 6"/>
+          <p:cNvPr id="8" name="TextBox 7"/>
           <p:cNvSpPr txBox="1"/>
           <p:nvPr/>
         </p:nvSpPr>
@@ -10230,7 +10364,7 @@
         <p:spPr>
           <a:xfrm>
             <a:off x="566928" y="1243584"/>
-            <a:ext cx="11057839" cy="1607820"/>
+            <a:ext cx="5943600" cy="2462784"/>
           </a:xfrm>
           <a:prstGeom prst="rect">
             <a:avLst/>
@@ -10347,11 +10481,32 @@
               <a:t>软件在发送前轮询该状态位，可以连续发送多个字节而不丢字。</a:t>
             </a:r>
           </a:p>
+          <a:p>
+            <a:pPr>
+              <a:lnSpc>
+                <a:spcPct val="130000"/>
+              </a:lnSpc>
+              <a:spcAft>
+                <a:spcPts val="500"/>
+              </a:spcAft>
+            </a:pPr>
+            <a:r>
+              <a:rPr sz="1400" b="0">
+                <a:solidFill>
+                  <a:srgbClr val="222222"/>
+                </a:solidFill>
+                <a:latin typeface="Microsoft YaHei"/>
+                <a:ea typeface="Microsoft YaHei"/>
+                <a:cs typeface="Microsoft YaHei"/>
+              </a:rPr>
+              <a:t>波形中第一次写入发生在空闲时而被接受，第二次写入发生在移位期间而被丢弃。</a:t>
+            </a:r>
+          </a:p>
         </p:txBody>
       </p:sp>
       <p:pic>
         <p:nvPicPr>
-          <p:cNvPr id="5" name="Picture 4" descr="diagram-txbusy-timing.png"/>
+          <p:cNvPr id="5" name="Picture 4" descr="3b_busy_write_dropped_20260915.png"/>
           <p:cNvPicPr>
             <a:picLocks noChangeAspect="1"/>
           </p:cNvPicPr>
@@ -10365,17 +10520,41 @@
         </p:blipFill>
         <p:spPr>
           <a:xfrm>
-            <a:off x="566928" y="3703028"/>
-            <a:ext cx="11057839" cy="2350591"/>
+            <a:off x="6909080" y="1243584"/>
+            <a:ext cx="4591455" cy="2697480"/>
           </a:xfrm>
           <a:prstGeom prst="rect">
             <a:avLst/>
           </a:prstGeom>
         </p:spPr>
       </p:pic>
-      <p:sp>
-        <p:nvSpPr>
-          <p:cNvPr id="6" name="TextBox 5"/>
+      <p:pic>
+        <p:nvPicPr>
+          <p:cNvPr id="6" name="Picture 5" descr="exp2-duplex.png"/>
+          <p:cNvPicPr>
+            <a:picLocks noChangeAspect="1"/>
+          </p:cNvPicPr>
+          <p:nvPr/>
+        </p:nvPicPr>
+        <p:blipFill>
+          <a:blip r:embed="rId3"/>
+          <a:stretch>
+            <a:fillRect/>
+          </a:stretch>
+        </p:blipFill>
+        <p:spPr>
+          <a:xfrm>
+            <a:off x="568299" y="4023360"/>
+            <a:ext cx="11055096" cy="2395728"/>
+          </a:xfrm>
+          <a:prstGeom prst="rect">
+            <a:avLst/>
+          </a:prstGeom>
+        </p:spPr>
+      </p:pic>
+      <p:sp>
+        <p:nvSpPr>
+          <p:cNvPr id="7" name="TextBox 6"/>
           <p:cNvSpPr txBox="1"/>
           <p:nvPr/>
         </p:nvSpPr>
@@ -10419,7 +10598,7 @@
       </p:sp>
       <p:sp>
         <p:nvSpPr>
-          <p:cNvPr id="7" name="TextBox 6"/>
+          <p:cNvPr id="8" name="TextBox 7"/>
           <p:cNvSpPr txBox="1"/>
           <p:nvPr/>
         </p:nvSpPr>
@@ -18440,87 +18619,30 @@
           </a:p>
         </p:txBody>
       </p:sp>
-      <p:sp>
-        <p:nvSpPr>
-          <p:cNvPr id="5" name="Rounded Rectangle 4"/>
-          <p:cNvSpPr/>
+      <p:pic>
+        <p:nvPicPr>
+          <p:cNvPr id="5" name="Picture 4" descr="下板终端日志.jpg"/>
+          <p:cNvPicPr>
+            <a:picLocks noChangeAspect="1"/>
+          </p:cNvPicPr>
           <p:nvPr/>
-        </p:nvSpPr>
+        </p:nvPicPr>
+        <p:blipFill>
+          <a:blip r:embed="rId2"/>
+          <a:stretch>
+            <a:fillRect/>
+          </a:stretch>
+        </p:blipFill>
         <p:spPr>
           <a:xfrm>
-            <a:off x="7150608" y="1335024"/>
-            <a:ext cx="4474159" cy="4992624"/>
+            <a:off x="7150608" y="2154182"/>
+            <a:ext cx="4474159" cy="3354307"/>
           </a:xfrm>
-          <a:prstGeom prst="roundRect">
-            <a:avLst>
-              <a:gd name="adj" fmla="val 1430"/>
-            </a:avLst>
+          <a:prstGeom prst="rect">
+            <a:avLst/>
           </a:prstGeom>
-          <a:solidFill>
-            <a:srgbClr val="F4F7FA"/>
-          </a:solidFill>
-          <a:ln w="12700">
-            <a:solidFill>
-              <a:srgbClr val="B06000"/>
-            </a:solidFill>
-          </a:ln>
-          <a:effectLst/>
         </p:spPr>
-        <p:style>
-          <a:lnRef idx="1">
-            <a:schemeClr val="accent1"/>
-          </a:lnRef>
-          <a:fillRef idx="3">
-            <a:schemeClr val="accent1"/>
-          </a:fillRef>
-          <a:effectRef idx="2">
-            <a:schemeClr val="accent1"/>
-          </a:effectRef>
-          <a:fontRef idx="minor">
-            <a:schemeClr val="lt1"/>
-          </a:fontRef>
-        </p:style>
-        <p:txBody>
-          <a:bodyPr rtlCol="0" anchor="ctr" wrap="square" lIns="45720" rIns="45720" tIns="18288" bIns="18288"/>
-          <a:lstStyle/>
-          <a:p>
-            <a:pPr algn="ctr">
-              <a:spcAft>
-                <a:spcPts val="0"/>
-              </a:spcAft>
-            </a:pPr>
-            <a:r>
-              <a:rPr sz="1100" b="0">
-                <a:solidFill>
-                  <a:srgbClr val="B06000"/>
-                </a:solidFill>
-                <a:latin typeface="Microsoft YaHei"/>
-                <a:ea typeface="Microsoft YaHei"/>
-                <a:cs typeface="Microsoft YaHei"/>
-              </a:rPr>
-              <a:t>图片待补充</a:t>
-            </a:r>
-          </a:p>
-          <a:p>
-            <a:pPr algn="ctr">
-              <a:spcAft>
-                <a:spcPts val="0"/>
-              </a:spcAft>
-            </a:pPr>
-            <a:r>
-              <a:rPr sz="1100" b="0">
-                <a:solidFill>
-                  <a:srgbClr val="B06000"/>
-                </a:solidFill>
-                <a:latin typeface="Microsoft YaHei"/>
-                <a:ea typeface="Microsoft YaHei"/>
-                <a:cs typeface="Microsoft YaHei"/>
-              </a:rPr>
-              <a:t>ppt/assets/下板终端日志.png</a:t>
-            </a:r>
-          </a:p>
-        </p:txBody>
-      </p:sp>
+      </p:pic>
       <p:sp>
         <p:nvSpPr>
           <p:cNvPr id="6" name="TextBox 5"/>
@@ -19733,7 +19855,7 @@
         </p:nvGraphicFramePr>
         <p:xfrm>
           <a:off x="566928" y="1712976"/>
-          <a:ext cx="11057837" cy="621792"/>
+          <a:ext cx="11057837" cy="1554480"/>
         </p:xfrm>
         <a:graphic>
           <a:graphicData uri="http://schemas.openxmlformats.org/drawingml/2006/table">
@@ -19742,9 +19864,9 @@
                 <a:tableStyleId>{5C22544A-7EE6-4342-B048-85BDC9FD1C3A}</a:tableStyleId>
               </a:tblPr>
               <a:tblGrid>
-                <a:gridCol w="3317351"/>
-                <a:gridCol w="4423135"/>
-                <a:gridCol w="3317351"/>
+                <a:gridCol w="1470178"/>
+                <a:gridCol w="6185248"/>
+                <a:gridCol w="3402411"/>
               </a:tblGrid>
               <a:tr h="310896">
                 <a:tc>
@@ -19801,7 +19923,7 @@
                           <a:ea typeface="Microsoft YaHei"/>
                           <a:cs typeface="Microsoft YaHei"/>
                         </a:rPr>
-                        <a:t>负责内容</a:t>
+                        <a:t>负责模块</a:t>
                       </a:r>
                     </a:p>
                   </a:txBody>
@@ -19833,7 +19955,7 @@
                           <a:ea typeface="Microsoft YaHei"/>
                           <a:cs typeface="Microsoft YaHei"/>
                         </a:rPr>
-                        <a:t>交付物</a:t>
+                        <a:t>交付内容</a:t>
                       </a:r>
                     </a:p>
                   </a:txBody>
@@ -19867,7 +19989,7 @@
                           <a:ea typeface="Microsoft YaHei"/>
                           <a:cs typeface="Microsoft YaHei"/>
                         </a:rPr>
-                        <a:t>待补充</a:t>
+                        <a:t>柯宁皓（组长）</a:t>
                       </a:r>
                     </a:p>
                   </a:txBody>
@@ -19899,7 +20021,7 @@
                           <a:ea typeface="Microsoft YaHei"/>
                           <a:cs typeface="Microsoft YaHei"/>
                         </a:rPr>
-                        <a:t>待补充</a:t>
+                        <a:t>验证回归、性能分析与上板测试</a:t>
                       </a:r>
                     </a:p>
                   </a:txBody>
@@ -19931,13 +20053,307 @@
                           <a:ea typeface="Microsoft YaHei"/>
                           <a:cs typeface="Microsoft YaHei"/>
                         </a:rPr>
-                        <a:t>待补充</a:t>
+                        <a:t>测试证据、性能数据与板级结果</a:t>
                       </a:r>
                     </a:p>
                   </a:txBody>
                   <a:tcPr marL="54864" marR="54864" marT="9144" marB="9144" anchor="ctr">
                     <a:solidFill>
                       <a:srgbClr val="F4F7FA"/>
+                    </a:solidFill>
+                  </a:tcPr>
+                </a:tc>
+              </a:tr>
+              <a:tr h="310896">
+                <a:tc>
+                  <a:txBody>
+                    <a:bodyPr/>
+                    <a:lstStyle/>
+                    <a:p>
+                      <a:pPr algn="l">
+                        <a:lnSpc>
+                          <a:spcPct val="115000"/>
+                        </a:lnSpc>
+                        <a:spcAft>
+                          <a:spcPts val="0"/>
+                        </a:spcAft>
+                      </a:pPr>
+                      <a:r>
+                        <a:rPr sz="1100" b="0">
+                          <a:solidFill>
+                            <a:srgbClr val="222222"/>
+                          </a:solidFill>
+                          <a:latin typeface="Microsoft YaHei"/>
+                          <a:ea typeface="Microsoft YaHei"/>
+                          <a:cs typeface="Microsoft YaHei"/>
+                        </a:rPr>
+                        <a:t>陈霆钧</a:t>
+                      </a:r>
+                    </a:p>
+                  </a:txBody>
+                  <a:tcPr marL="54864" marR="54864" marT="9144" marB="9144" anchor="ctr">
+                    <a:solidFill>
+                      <a:srgbClr val="FFFFFF"/>
+                    </a:solidFill>
+                  </a:tcPr>
+                </a:tc>
+                <a:tc>
+                  <a:txBody>
+                    <a:bodyPr/>
+                    <a:lstStyle/>
+                    <a:p>
+                      <a:pPr algn="l">
+                        <a:lnSpc>
+                          <a:spcPct val="115000"/>
+                        </a:lnSpc>
+                        <a:spcAft>
+                          <a:spcPts val="0"/>
+                        </a:spcAft>
+                      </a:pPr>
+                      <a:r>
+                        <a:rPr sz="1100" b="0">
+                          <a:solidFill>
+                            <a:srgbClr val="222222"/>
+                          </a:solidFill>
+                          <a:latin typeface="Microsoft YaHei"/>
+                          <a:ea typeface="Microsoft YaHei"/>
+                          <a:cs typeface="Microsoft YaHei"/>
+                        </a:rPr>
+                        <a:t>IF/ID 前端：pc_reg、imem、if_id、decode、regfile、id_ex</a:t>
+                      </a:r>
+                    </a:p>
+                  </a:txBody>
+                  <a:tcPr marL="54864" marR="54864" marT="9144" marB="9144" anchor="ctr">
+                    <a:solidFill>
+                      <a:srgbClr val="FFFFFF"/>
+                    </a:solidFill>
+                  </a:tcPr>
+                </a:tc>
+                <a:tc>
+                  <a:txBody>
+                    <a:bodyPr/>
+                    <a:lstStyle/>
+                    <a:p>
+                      <a:pPr algn="l">
+                        <a:lnSpc>
+                          <a:spcPct val="115000"/>
+                        </a:lnSpc>
+                        <a:spcAft>
+                          <a:spcPts val="0"/>
+                        </a:spcAft>
+                      </a:pPr>
+                      <a:r>
+                        <a:rPr sz="1100" b="0">
+                          <a:solidFill>
+                            <a:srgbClr val="222222"/>
+                          </a:solidFill>
+                          <a:latin typeface="Microsoft YaHei"/>
+                          <a:ea typeface="Microsoft YaHei"/>
+                          <a:cs typeface="Microsoft YaHei"/>
+                        </a:rPr>
+                        <a:t>各模块 RTL 与模块单测</a:t>
+                      </a:r>
+                    </a:p>
+                  </a:txBody>
+                  <a:tcPr marL="54864" marR="54864" marT="9144" marB="9144" anchor="ctr">
+                    <a:solidFill>
+                      <a:srgbClr val="FFFFFF"/>
+                    </a:solidFill>
+                  </a:tcPr>
+                </a:tc>
+              </a:tr>
+              <a:tr h="310896">
+                <a:tc>
+                  <a:txBody>
+                    <a:bodyPr/>
+                    <a:lstStyle/>
+                    <a:p>
+                      <a:pPr algn="l">
+                        <a:lnSpc>
+                          <a:spcPct val="115000"/>
+                        </a:lnSpc>
+                        <a:spcAft>
+                          <a:spcPts val="0"/>
+                        </a:spcAft>
+                      </a:pPr>
+                      <a:r>
+                        <a:rPr sz="1100" b="0">
+                          <a:solidFill>
+                            <a:srgbClr val="222222"/>
+                          </a:solidFill>
+                          <a:latin typeface="Microsoft YaHei"/>
+                          <a:ea typeface="Microsoft YaHei"/>
+                          <a:cs typeface="Microsoft YaHei"/>
+                        </a:rPr>
+                        <a:t>伍奕涛</a:t>
+                      </a:r>
+                    </a:p>
+                  </a:txBody>
+                  <a:tcPr marL="54864" marR="54864" marT="9144" marB="9144" anchor="ctr">
+                    <a:solidFill>
+                      <a:srgbClr val="F4F7FA"/>
+                    </a:solidFill>
+                  </a:tcPr>
+                </a:tc>
+                <a:tc>
+                  <a:txBody>
+                    <a:bodyPr/>
+                    <a:lstStyle/>
+                    <a:p>
+                      <a:pPr algn="l">
+                        <a:lnSpc>
+                          <a:spcPct val="115000"/>
+                        </a:lnSpc>
+                        <a:spcAft>
+                          <a:spcPts val="0"/>
+                        </a:spcAft>
+                      </a:pPr>
+                      <a:r>
+                        <a:rPr sz="1100" b="0">
+                          <a:solidFill>
+                            <a:srgbClr val="222222"/>
+                          </a:solidFill>
+                          <a:latin typeface="Microsoft YaHei"/>
+                          <a:ea typeface="Microsoft YaHei"/>
+                          <a:cs typeface="Microsoft YaHei"/>
+                        </a:rPr>
+                        <a:t>EX/MEM 执行与访存：execute、alu、ex_mem、dmem、mem_wb</a:t>
+                      </a:r>
+                    </a:p>
+                  </a:txBody>
+                  <a:tcPr marL="54864" marR="54864" marT="9144" marB="9144" anchor="ctr">
+                    <a:solidFill>
+                      <a:srgbClr val="F4F7FA"/>
+                    </a:solidFill>
+                  </a:tcPr>
+                </a:tc>
+                <a:tc>
+                  <a:txBody>
+                    <a:bodyPr/>
+                    <a:lstStyle/>
+                    <a:p>
+                      <a:pPr algn="l">
+                        <a:lnSpc>
+                          <a:spcPct val="115000"/>
+                        </a:lnSpc>
+                        <a:spcAft>
+                          <a:spcPts val="0"/>
+                        </a:spcAft>
+                      </a:pPr>
+                      <a:r>
+                        <a:rPr sz="1100" b="0">
+                          <a:solidFill>
+                            <a:srgbClr val="222222"/>
+                          </a:solidFill>
+                          <a:latin typeface="Microsoft YaHei"/>
+                          <a:ea typeface="Microsoft YaHei"/>
+                          <a:cs typeface="Microsoft YaHei"/>
+                        </a:rPr>
+                        <a:t>执行访存 RTL、溢出判断与模块单测</a:t>
+                      </a:r>
+                    </a:p>
+                  </a:txBody>
+                  <a:tcPr marL="54864" marR="54864" marT="9144" marB="9144" anchor="ctr">
+                    <a:solidFill>
+                      <a:srgbClr val="F4F7FA"/>
+                    </a:solidFill>
+                  </a:tcPr>
+                </a:tc>
+              </a:tr>
+              <a:tr h="310896">
+                <a:tc>
+                  <a:txBody>
+                    <a:bodyPr/>
+                    <a:lstStyle/>
+                    <a:p>
+                      <a:pPr algn="l">
+                        <a:lnSpc>
+                          <a:spcPct val="115000"/>
+                        </a:lnSpc>
+                        <a:spcAft>
+                          <a:spcPts val="0"/>
+                        </a:spcAft>
+                      </a:pPr>
+                      <a:r>
+                        <a:rPr sz="1100" b="0">
+                          <a:solidFill>
+                            <a:srgbClr val="222222"/>
+                          </a:solidFill>
+                          <a:latin typeface="Microsoft YaHei"/>
+                          <a:ea typeface="Microsoft YaHei"/>
+                          <a:cs typeface="Microsoft YaHei"/>
+                        </a:rPr>
+                        <a:t>陈乔</a:t>
+                      </a:r>
+                    </a:p>
+                  </a:txBody>
+                  <a:tcPr marL="54864" marR="54864" marT="9144" marB="9144" anchor="ctr">
+                    <a:solidFill>
+                      <a:srgbClr val="FFFFFF"/>
+                    </a:solidFill>
+                  </a:tcPr>
+                </a:tc>
+                <a:tc>
+                  <a:txBody>
+                    <a:bodyPr/>
+                    <a:lstStyle/>
+                    <a:p>
+                      <a:pPr algn="l">
+                        <a:lnSpc>
+                          <a:spcPct val="115000"/>
+                        </a:lnSpc>
+                        <a:spcAft>
+                          <a:spcPts val="0"/>
+                        </a:spcAft>
+                      </a:pPr>
+                      <a:r>
+                        <a:rPr sz="1100" b="0">
+                          <a:solidFill>
+                            <a:srgbClr val="222222"/>
+                          </a:solidFill>
+                          <a:latin typeface="Microsoft YaHei"/>
+                          <a:ea typeface="Microsoft YaHei"/>
+                          <a:cs typeface="Microsoft YaHei"/>
+                        </a:rPr>
+                        <a:t>WB、冒险处理与 pipeline_top 顶层装配</a:t>
+                      </a:r>
+                    </a:p>
+                  </a:txBody>
+                  <a:tcPr marL="54864" marR="54864" marT="9144" marB="9144" anchor="ctr">
+                    <a:solidFill>
+                      <a:srgbClr val="FFFFFF"/>
+                    </a:solidFill>
+                  </a:tcPr>
+                </a:tc>
+                <a:tc>
+                  <a:txBody>
+                    <a:bodyPr/>
+                    <a:lstStyle/>
+                    <a:p>
+                      <a:pPr algn="l">
+                        <a:lnSpc>
+                          <a:spcPct val="115000"/>
+                        </a:lnSpc>
+                        <a:spcAft>
+                          <a:spcPts val="0"/>
+                        </a:spcAft>
+                      </a:pPr>
+                      <a:r>
+                        <a:rPr sz="1100" b="0">
+                          <a:solidFill>
+                            <a:srgbClr val="222222"/>
+                          </a:solidFill>
+                          <a:latin typeface="Microsoft YaHei"/>
+                          <a:ea typeface="Microsoft YaHei"/>
+                          <a:cs typeface="Microsoft YaHei"/>
+                        </a:rPr>
+                        <a:t>回写、前递、冻结、冲刷与顶层装配</a:t>
+                      </a:r>
+                    </a:p>
+                  </a:txBody>
+                  <a:tcPr marL="54864" marR="54864" marT="9144" marB="9144" anchor="ctr">
+                    <a:solidFill>
+                      <a:srgbClr val="FFFFFF"/>
                     </a:solidFill>
                   </a:tcPr>
                 </a:tc>

--- a/ppt/out/课程设计_验收答辩.pptx
+++ b/ppt/out/课程设计_验收答辩.pptx
@@ -2777,7 +2777,7 @@
           <a:lstStyle/>
           <a:p>
             <a:r>
-              <a:t>时间：约 0.3 分钟。</a:t>
+              <a:t>时间：约 0.5 分钟。</a:t>
             </a:r>
           </a:p>
         </p:txBody>
@@ -19515,7 +19515,7 @@
                 <a:ea typeface="Microsoft YaHei"/>
                 <a:cs typeface="Microsoft YaHei"/>
               </a:rPr>
-              <a:t>代码按三层组织，便于划分交付边界与复用关系。</a:t>
+              <a:t>代码按三层组织，便于划分层次边界与复用关系。</a:t>
             </a:r>
           </a:p>
           <a:p>
@@ -19840,7 +19840,7 @@
                 <a:ea typeface="Microsoft YaHei"/>
                 <a:cs typeface="Microsoft YaHei"/>
               </a:rPr>
-              <a:t>组内分工如下表所示，每位成员负责的模块与交付物列在表中。</a:t>
+              <a:t>组内分工如下表所示。</a:t>
             </a:r>
           </a:p>
         </p:txBody>
@@ -19855,7 +19855,7 @@
         </p:nvGraphicFramePr>
         <p:xfrm>
           <a:off x="566928" y="1712976"/>
-          <a:ext cx="11057837" cy="1554480"/>
+          <a:ext cx="11057838" cy="1554480"/>
         </p:xfrm>
         <a:graphic>
           <a:graphicData uri="http://schemas.openxmlformats.org/drawingml/2006/table">
@@ -19864,9 +19864,8 @@
                 <a:tableStyleId>{5C22544A-7EE6-4342-B048-85BDC9FD1C3A}</a:tableStyleId>
               </a:tblPr>
               <a:tblGrid>
-                <a:gridCol w="1470178"/>
-                <a:gridCol w="6185248"/>
-                <a:gridCol w="3402411"/>
+                <a:gridCol w="2024833"/>
+                <a:gridCol w="9033005"/>
               </a:tblGrid>
               <a:tr h="310896">
                 <a:tc>
@@ -19891,7 +19890,7 @@
                           <a:ea typeface="Microsoft YaHei"/>
                           <a:cs typeface="Microsoft YaHei"/>
                         </a:rPr>
-                        <a:t>组员</a:t>
+                        <a:t>实验一：处理器核心</a:t>
                       </a:r>
                     </a:p>
                   </a:txBody>
@@ -19923,39 +19922,7 @@
                           <a:ea typeface="Microsoft YaHei"/>
                           <a:cs typeface="Microsoft YaHei"/>
                         </a:rPr>
-                        <a:t>负责模块</a:t>
-                      </a:r>
-                    </a:p>
-                  </a:txBody>
-                  <a:tcPr marL="54864" marR="54864" marT="9144" marB="9144" anchor="ctr">
-                    <a:solidFill>
-                      <a:srgbClr val="1F3A5F"/>
-                    </a:solidFill>
-                  </a:tcPr>
-                </a:tc>
-                <a:tc>
-                  <a:txBody>
-                    <a:bodyPr/>
-                    <a:lstStyle/>
-                    <a:p>
-                      <a:pPr algn="ctr">
-                        <a:lnSpc>
-                          <a:spcPct val="115000"/>
-                        </a:lnSpc>
-                        <a:spcAft>
-                          <a:spcPts val="0"/>
-                        </a:spcAft>
-                      </a:pPr>
-                      <a:r>
-                        <a:rPr sz="1100" b="1">
-                          <a:solidFill>
-                            <a:srgbClr val="FFFFFF"/>
-                          </a:solidFill>
-                          <a:latin typeface="Microsoft YaHei"/>
-                          <a:ea typeface="Microsoft YaHei"/>
-                          <a:cs typeface="Microsoft YaHei"/>
-                        </a:rPr>
-                        <a:t>交付内容</a:t>
+                        <a:t>负责内容</a:t>
                       </a:r>
                     </a:p>
                   </a:txBody>
@@ -20021,39 +19988,7 @@
                           <a:ea typeface="Microsoft YaHei"/>
                           <a:cs typeface="Microsoft YaHei"/>
                         </a:rPr>
-                        <a:t>验证回归、性能分析与上板测试</a:t>
-                      </a:r>
-                    </a:p>
-                  </a:txBody>
-                  <a:tcPr marL="54864" marR="54864" marT="9144" marB="9144" anchor="ctr">
-                    <a:solidFill>
-                      <a:srgbClr val="F4F7FA"/>
-                    </a:solidFill>
-                  </a:tcPr>
-                </a:tc>
-                <a:tc>
-                  <a:txBody>
-                    <a:bodyPr/>
-                    <a:lstStyle/>
-                    <a:p>
-                      <a:pPr algn="l">
-                        <a:lnSpc>
-                          <a:spcPct val="115000"/>
-                        </a:lnSpc>
-                        <a:spcAft>
-                          <a:spcPts val="0"/>
-                        </a:spcAft>
-                      </a:pPr>
-                      <a:r>
-                        <a:rPr sz="1100" b="0">
-                          <a:solidFill>
-                            <a:srgbClr val="222222"/>
-                          </a:solidFill>
-                          <a:latin typeface="Microsoft YaHei"/>
-                          <a:ea typeface="Microsoft YaHei"/>
-                          <a:cs typeface="Microsoft YaHei"/>
-                        </a:rPr>
-                        <a:t>测试证据、性能数据与板级结果</a:t>
+                        <a:t>验证回归、性能分析与上板测试，整理测试证据、性能数据与板级结果</a:t>
                       </a:r>
                     </a:p>
                   </a:txBody>
@@ -20119,39 +20054,7 @@
                           <a:ea typeface="Microsoft YaHei"/>
                           <a:cs typeface="Microsoft YaHei"/>
                         </a:rPr>
-                        <a:t>IF/ID 前端：pc_reg、imem、if_id、decode、regfile、id_ex</a:t>
-                      </a:r>
-                    </a:p>
-                  </a:txBody>
-                  <a:tcPr marL="54864" marR="54864" marT="9144" marB="9144" anchor="ctr">
-                    <a:solidFill>
-                      <a:srgbClr val="FFFFFF"/>
-                    </a:solidFill>
-                  </a:tcPr>
-                </a:tc>
-                <a:tc>
-                  <a:txBody>
-                    <a:bodyPr/>
-                    <a:lstStyle/>
-                    <a:p>
-                      <a:pPr algn="l">
-                        <a:lnSpc>
-                          <a:spcPct val="115000"/>
-                        </a:lnSpc>
-                        <a:spcAft>
-                          <a:spcPts val="0"/>
-                        </a:spcAft>
-                      </a:pPr>
-                      <a:r>
-                        <a:rPr sz="1100" b="0">
-                          <a:solidFill>
-                            <a:srgbClr val="222222"/>
-                          </a:solidFill>
-                          <a:latin typeface="Microsoft YaHei"/>
-                          <a:ea typeface="Microsoft YaHei"/>
-                          <a:cs typeface="Microsoft YaHei"/>
-                        </a:rPr>
-                        <a:t>各模块 RTL 与模块单测</a:t>
+                        <a:t>IF/ID 前端：pc_reg、imem、if_id、decode、regfile、id_ex，以及各模块单测</a:t>
                       </a:r>
                     </a:p>
                   </a:txBody>
@@ -20217,39 +20120,7 @@
                           <a:ea typeface="Microsoft YaHei"/>
                           <a:cs typeface="Microsoft YaHei"/>
                         </a:rPr>
-                        <a:t>EX/MEM 执行与访存：execute、alu、ex_mem、dmem、mem_wb</a:t>
-                      </a:r>
-                    </a:p>
-                  </a:txBody>
-                  <a:tcPr marL="54864" marR="54864" marT="9144" marB="9144" anchor="ctr">
-                    <a:solidFill>
-                      <a:srgbClr val="F4F7FA"/>
-                    </a:solidFill>
-                  </a:tcPr>
-                </a:tc>
-                <a:tc>
-                  <a:txBody>
-                    <a:bodyPr/>
-                    <a:lstStyle/>
-                    <a:p>
-                      <a:pPr algn="l">
-                        <a:lnSpc>
-                          <a:spcPct val="115000"/>
-                        </a:lnSpc>
-                        <a:spcAft>
-                          <a:spcPts val="0"/>
-                        </a:spcAft>
-                      </a:pPr>
-                      <a:r>
-                        <a:rPr sz="1100" b="0">
-                          <a:solidFill>
-                            <a:srgbClr val="222222"/>
-                          </a:solidFill>
-                          <a:latin typeface="Microsoft YaHei"/>
-                          <a:ea typeface="Microsoft YaHei"/>
-                          <a:cs typeface="Microsoft YaHei"/>
-                        </a:rPr>
-                        <a:t>执行访存 RTL、溢出判断与模块单测</a:t>
+                        <a:t>EX/MEM 执行与访存：execute、alu、ex_mem、dmem、mem_wb，以及溢出判断与模块单测</a:t>
                       </a:r>
                     </a:p>
                   </a:txBody>
@@ -20315,7 +20186,199 @@
                           <a:ea typeface="Microsoft YaHei"/>
                           <a:cs typeface="Microsoft YaHei"/>
                         </a:rPr>
-                        <a:t>WB、冒险处理与 pipeline_top 顶层装配</a:t>
+                        <a:t>WB、冒险处理与 pipeline_top 顶层装配：回写、前递、冻结与冲刷逻辑</a:t>
+                      </a:r>
+                    </a:p>
+                  </a:txBody>
+                  <a:tcPr marL="54864" marR="54864" marT="9144" marB="9144" anchor="ctr">
+                    <a:solidFill>
+                      <a:srgbClr val="FFFFFF"/>
+                    </a:solidFill>
+                  </a:tcPr>
+                </a:tc>
+              </a:tr>
+            </a:tbl>
+          </a:graphicData>
+        </a:graphic>
+      </p:graphicFrame>
+      <p:graphicFrame>
+        <p:nvGraphicFramePr>
+          <p:cNvPr id="6" name="Table 5"/>
+          <p:cNvGraphicFramePr>
+            <a:graphicFrameLocks noGrp="1"/>
+          </p:cNvGraphicFramePr>
+          <p:nvPr/>
+        </p:nvGraphicFramePr>
+        <p:xfrm>
+          <a:off x="566928" y="3377184"/>
+          <a:ext cx="11057838" cy="1554480"/>
+        </p:xfrm>
+        <a:graphic>
+          <a:graphicData uri="http://schemas.openxmlformats.org/drawingml/2006/table">
+            <a:tbl>
+              <a:tblPr firstRow="1" bandRow="1">
+                <a:tableStyleId>{5C22544A-7EE6-4342-B048-85BDC9FD1C3A}</a:tableStyleId>
+              </a:tblPr>
+              <a:tblGrid>
+                <a:gridCol w="2415488"/>
+                <a:gridCol w="8642350"/>
+              </a:tblGrid>
+              <a:tr h="310896">
+                <a:tc>
+                  <a:txBody>
+                    <a:bodyPr/>
+                    <a:lstStyle/>
+                    <a:p>
+                      <a:pPr algn="ctr">
+                        <a:lnSpc>
+                          <a:spcPct val="115000"/>
+                        </a:lnSpc>
+                        <a:spcAft>
+                          <a:spcPts val="0"/>
+                        </a:spcAft>
+                      </a:pPr>
+                      <a:r>
+                        <a:rPr sz="1100" b="1">
+                          <a:solidFill>
+                            <a:srgbClr val="FFFFFF"/>
+                          </a:solidFill>
+                          <a:latin typeface="Microsoft YaHei"/>
+                          <a:ea typeface="Microsoft YaHei"/>
+                          <a:cs typeface="Microsoft YaHei"/>
+                        </a:rPr>
+                        <a:t>实验二：UART 与 SoC</a:t>
+                      </a:r>
+                    </a:p>
+                  </a:txBody>
+                  <a:tcPr marL="54864" marR="54864" marT="9144" marB="9144" anchor="ctr">
+                    <a:solidFill>
+                      <a:srgbClr val="1F3A5F"/>
+                    </a:solidFill>
+                  </a:tcPr>
+                </a:tc>
+                <a:tc>
+                  <a:txBody>
+                    <a:bodyPr/>
+                    <a:lstStyle/>
+                    <a:p>
+                      <a:pPr algn="ctr">
+                        <a:lnSpc>
+                          <a:spcPct val="115000"/>
+                        </a:lnSpc>
+                        <a:spcAft>
+                          <a:spcPts val="0"/>
+                        </a:spcAft>
+                      </a:pPr>
+                      <a:r>
+                        <a:rPr sz="1100" b="1">
+                          <a:solidFill>
+                            <a:srgbClr val="FFFFFF"/>
+                          </a:solidFill>
+                          <a:latin typeface="Microsoft YaHei"/>
+                          <a:ea typeface="Microsoft YaHei"/>
+                          <a:cs typeface="Microsoft YaHei"/>
+                        </a:rPr>
+                        <a:t>负责内容</a:t>
+                      </a:r>
+                    </a:p>
+                  </a:txBody>
+                  <a:tcPr marL="54864" marR="54864" marT="9144" marB="9144" anchor="ctr">
+                    <a:solidFill>
+                      <a:srgbClr val="1F3A5F"/>
+                    </a:solidFill>
+                  </a:tcPr>
+                </a:tc>
+              </a:tr>
+              <a:tr h="310896">
+                <a:tc>
+                  <a:txBody>
+                    <a:bodyPr/>
+                    <a:lstStyle/>
+                    <a:p>
+                      <a:pPr algn="l">
+                        <a:lnSpc>
+                          <a:spcPct val="115000"/>
+                        </a:lnSpc>
+                        <a:spcAft>
+                          <a:spcPts val="0"/>
+                        </a:spcAft>
+                      </a:pPr>
+                      <a:r>
+                        <a:rPr sz="1100" b="0">
+                          <a:solidFill>
+                            <a:srgbClr val="222222"/>
+                          </a:solidFill>
+                          <a:latin typeface="Microsoft YaHei"/>
+                          <a:ea typeface="Microsoft YaHei"/>
+                          <a:cs typeface="Microsoft YaHei"/>
+                        </a:rPr>
+                        <a:t>柯宁皓（组长）</a:t>
+                      </a:r>
+                    </a:p>
+                  </a:txBody>
+                  <a:tcPr marL="54864" marR="54864" marT="9144" marB="9144" anchor="ctr">
+                    <a:solidFill>
+                      <a:srgbClr val="F4F7FA"/>
+                    </a:solidFill>
+                  </a:tcPr>
+                </a:tc>
+                <a:tc>
+                  <a:txBody>
+                    <a:bodyPr/>
+                    <a:lstStyle/>
+                    <a:p>
+                      <a:pPr algn="l">
+                        <a:lnSpc>
+                          <a:spcPct val="115000"/>
+                        </a:lnSpc>
+                        <a:spcAft>
+                          <a:spcPts val="0"/>
+                        </a:spcAft>
+                      </a:pPr>
+                      <a:r>
+                        <a:rPr sz="1100" b="0">
+                          <a:solidFill>
+                            <a:srgbClr val="222222"/>
+                          </a:solidFill>
+                          <a:latin typeface="Microsoft YaHei"/>
+                          <a:ea typeface="Microsoft YaHei"/>
+                          <a:cs typeface="Microsoft YaHei"/>
+                        </a:rPr>
+                        <a:t>SoC 装配、复位同步、性能分析与上板测试，维护系统级回归与板级验证记录</a:t>
+                      </a:r>
+                    </a:p>
+                  </a:txBody>
+                  <a:tcPr marL="54864" marR="54864" marT="9144" marB="9144" anchor="ctr">
+                    <a:solidFill>
+                      <a:srgbClr val="F4F7FA"/>
+                    </a:solidFill>
+                  </a:tcPr>
+                </a:tc>
+              </a:tr>
+              <a:tr h="310896">
+                <a:tc>
+                  <a:txBody>
+                    <a:bodyPr/>
+                    <a:lstStyle/>
+                    <a:p>
+                      <a:pPr algn="l">
+                        <a:lnSpc>
+                          <a:spcPct val="115000"/>
+                        </a:lnSpc>
+                        <a:spcAft>
+                          <a:spcPts val="0"/>
+                        </a:spcAft>
+                      </a:pPr>
+                      <a:r>
+                        <a:rPr sz="1100" b="0">
+                          <a:solidFill>
+                            <a:srgbClr val="222222"/>
+                          </a:solidFill>
+                          <a:latin typeface="Microsoft YaHei"/>
+                          <a:ea typeface="Microsoft YaHei"/>
+                          <a:cs typeface="Microsoft YaHei"/>
+                        </a:rPr>
+                        <a:t>陈霆钧</a:t>
                       </a:r>
                     </a:p>
                   </a:txBody>
@@ -20347,7 +20410,139 @@
                           <a:ea typeface="Microsoft YaHei"/>
                           <a:cs typeface="Microsoft YaHei"/>
                         </a:rPr>
-                        <a:t>回写、前递、冻结、冲刷与顶层装配</a:t>
+                        <a:t>UART 协议与收发引擎：uart_tx、uart_rx，以及帧级协议单测</a:t>
+                      </a:r>
+                    </a:p>
+                  </a:txBody>
+                  <a:tcPr marL="54864" marR="54864" marT="9144" marB="9144" anchor="ctr">
+                    <a:solidFill>
+                      <a:srgbClr val="FFFFFF"/>
+                    </a:solidFill>
+                  </a:tcPr>
+                </a:tc>
+              </a:tr>
+              <a:tr h="310896">
+                <a:tc>
+                  <a:txBody>
+                    <a:bodyPr/>
+                    <a:lstStyle/>
+                    <a:p>
+                      <a:pPr algn="l">
+                        <a:lnSpc>
+                          <a:spcPct val="115000"/>
+                        </a:lnSpc>
+                        <a:spcAft>
+                          <a:spcPts val="0"/>
+                        </a:spcAft>
+                      </a:pPr>
+                      <a:r>
+                        <a:rPr sz="1100" b="0">
+                          <a:solidFill>
+                            <a:srgbClr val="222222"/>
+                          </a:solidFill>
+                          <a:latin typeface="Microsoft YaHei"/>
+                          <a:ea typeface="Microsoft YaHei"/>
+                          <a:cs typeface="Microsoft YaHei"/>
+                        </a:rPr>
+                        <a:t>伍奕涛</a:t>
+                      </a:r>
+                    </a:p>
+                  </a:txBody>
+                  <a:tcPr marL="54864" marR="54864" marT="9144" marB="9144" anchor="ctr">
+                    <a:solidFill>
+                      <a:srgbClr val="F4F7FA"/>
+                    </a:solidFill>
+                  </a:tcPr>
+                </a:tc>
+                <a:tc>
+                  <a:txBody>
+                    <a:bodyPr/>
+                    <a:lstStyle/>
+                    <a:p>
+                      <a:pPr algn="l">
+                        <a:lnSpc>
+                          <a:spcPct val="115000"/>
+                        </a:lnSpc>
+                        <a:spcAft>
+                          <a:spcPts val="0"/>
+                        </a:spcAft>
+                      </a:pPr>
+                      <a:r>
+                        <a:rPr sz="1100" b="0">
+                          <a:solidFill>
+                            <a:srgbClr val="222222"/>
+                          </a:solidFill>
+                          <a:latin typeface="Microsoft YaHei"/>
+                          <a:ea typeface="Microsoft YaHei"/>
+                          <a:cs typeface="Microsoft YaHei"/>
+                        </a:rPr>
+                        <a:t>寄存器层与 uart_ip_top：槽译码、读写时序、TX_BUSY 与 RX_VALID 语义</a:t>
+                      </a:r>
+                    </a:p>
+                  </a:txBody>
+                  <a:tcPr marL="54864" marR="54864" marT="9144" marB="9144" anchor="ctr">
+                    <a:solidFill>
+                      <a:srgbClr val="F4F7FA"/>
+                    </a:solidFill>
+                  </a:tcPr>
+                </a:tc>
+              </a:tr>
+              <a:tr h="310896">
+                <a:tc>
+                  <a:txBody>
+                    <a:bodyPr/>
+                    <a:lstStyle/>
+                    <a:p>
+                      <a:pPr algn="l">
+                        <a:lnSpc>
+                          <a:spcPct val="115000"/>
+                        </a:lnSpc>
+                        <a:spcAft>
+                          <a:spcPts val="0"/>
+                        </a:spcAft>
+                      </a:pPr>
+                      <a:r>
+                        <a:rPr sz="1100" b="0">
+                          <a:solidFill>
+                            <a:srgbClr val="222222"/>
+                          </a:solidFill>
+                          <a:latin typeface="Microsoft YaHei"/>
+                          <a:ea typeface="Microsoft YaHei"/>
+                          <a:cs typeface="Microsoft YaHei"/>
+                        </a:rPr>
+                        <a:t>陈乔</a:t>
+                      </a:r>
+                    </a:p>
+                  </a:txBody>
+                  <a:tcPr marL="54864" marR="54864" marT="9144" marB="9144" anchor="ctr">
+                    <a:solidFill>
+                      <a:srgbClr val="FFFFFF"/>
+                    </a:solidFill>
+                  </a:tcPr>
+                </a:tc>
+                <a:tc>
+                  <a:txBody>
+                    <a:bodyPr/>
+                    <a:lstStyle/>
+                    <a:p>
+                      <a:pPr algn="l">
+                        <a:lnSpc>
+                          <a:spcPct val="115000"/>
+                        </a:lnSpc>
+                        <a:spcAft>
+                          <a:spcPts val="0"/>
+                        </a:spcAft>
+                      </a:pPr>
+                      <a:r>
+                        <a:rPr sz="1100" b="0">
+                          <a:solidFill>
+                            <a:srgbClr val="222222"/>
+                          </a:solidFill>
+                          <a:latin typeface="Microsoft YaHei"/>
+                          <a:ea typeface="Microsoft YaHei"/>
+                          <a:cs typeface="Microsoft YaHei"/>
+                        </a:rPr>
+                        <a:t>console 固件与程序固化：.S → .hex → .vh 流程，以及 banner 与回显程序</a:t>
                       </a:r>
                     </a:p>
                   </a:txBody>
@@ -20364,7 +20559,7 @@
       </p:graphicFrame>
       <p:sp>
         <p:nvSpPr>
-          <p:cNvPr id="6" name="TextBox 5"/>
+          <p:cNvPr id="7" name="TextBox 6"/>
           <p:cNvSpPr txBox="1"/>
           <p:nvPr/>
         </p:nvSpPr>
@@ -20408,7 +20603,7 @@
       </p:sp>
       <p:sp>
         <p:nvSpPr>
-          <p:cNvPr id="7" name="TextBox 6"/>
+          <p:cNvPr id="8" name="TextBox 7"/>
           <p:cNvSpPr txBox="1"/>
           <p:nvPr/>
         </p:nvSpPr>

--- a/ppt/out/课程设计_验收答辩.pptx
+++ b/ppt/out/课程设计_验收答辩.pptx
@@ -2007,7 +2007,7 @@
           <a:lstStyle/>
           <a:p>
             <a:r>
-              <a:t>时间：约 0.3 分钟。</a:t>
+              <a:t>时间：约 0.5 分钟。图：回归测试的运行输出与汇总结果。</a:t>
             </a:r>
           </a:p>
         </p:txBody>
@@ -13001,7 +13001,7 @@
         <p:spPr>
           <a:xfrm>
             <a:off x="566928" y="1243584"/>
-            <a:ext cx="11057839" cy="1078992"/>
+            <a:ext cx="11057839" cy="1286256"/>
           </a:xfrm>
           <a:prstGeom prst="rect">
             <a:avLst/>
@@ -13023,7 +13023,7 @@
               </a:spcAft>
             </a:pPr>
             <a:r>
-              <a:rPr sz="1600" b="0">
+              <a:rPr sz="1400" b="0">
                 <a:solidFill>
                   <a:srgbClr val="222222"/>
                 </a:solidFill>
@@ -13044,7 +13044,7 @@
               </a:spcAft>
             </a:pPr>
             <a:r>
-              <a:rPr sz="1600" b="0">
+              <a:rPr sz="1400" b="0">
                 <a:solidFill>
                   <a:srgbClr val="222222"/>
                 </a:solidFill>
@@ -13065,7 +13065,7 @@
               </a:spcAft>
             </a:pPr>
             <a:r>
-              <a:rPr sz="1600" b="0">
+              <a:rPr sz="1400" b="0">
                 <a:solidFill>
                   <a:srgbClr val="222222"/>
                 </a:solidFill>
@@ -13073,14 +13073,83 @@
                 <a:ea typeface="Microsoft YaHei"/>
                 <a:cs typeface="Microsoft YaHei"/>
               </a:rPr>
+              <a:t>处理器核心的回归测试共 23 项，覆盖模块级、程序级、性能与顶层用例，一次运行全部通过，无缺失或超时。</a:t>
+            </a:r>
+          </a:p>
+          <a:p>
+            <a:pPr>
+              <a:lnSpc>
+                <a:spcPct val="130000"/>
+              </a:lnSpc>
+              <a:spcAft>
+                <a:spcPts val="500"/>
+              </a:spcAft>
+            </a:pPr>
+            <a:r>
+              <a:rPr sz="1400" b="0">
+                <a:solidFill>
+                  <a:srgbClr val="222222"/>
+                </a:solidFill>
+                <a:latin typeface="Microsoft YaHei"/>
+                <a:ea typeface="Microsoft YaHei"/>
+                <a:cs typeface="Microsoft YaHei"/>
+              </a:rPr>
               <a:t>三类测试均已通过。</a:t>
             </a:r>
           </a:p>
         </p:txBody>
       </p:sp>
-      <p:sp>
-        <p:nvSpPr>
-          <p:cNvPr id="5" name="TextBox 4"/>
+      <p:pic>
+        <p:nvPicPr>
+          <p:cNvPr id="5" name="Picture 4" descr="回归测试_运行_20260916.png"/>
+          <p:cNvPicPr>
+            <a:picLocks noChangeAspect="1"/>
+          </p:cNvPicPr>
+          <p:nvPr/>
+        </p:nvPicPr>
+        <p:blipFill>
+          <a:blip r:embed="rId2"/>
+          <a:stretch>
+            <a:fillRect/>
+          </a:stretch>
+        </p:blipFill>
+        <p:spPr>
+          <a:xfrm>
+            <a:off x="566928" y="3522845"/>
+            <a:ext cx="5391759" cy="2710957"/>
+          </a:xfrm>
+          <a:prstGeom prst="rect">
+            <a:avLst/>
+          </a:prstGeom>
+        </p:spPr>
+      </p:pic>
+      <p:pic>
+        <p:nvPicPr>
+          <p:cNvPr id="6" name="Picture 5" descr="回归测试_汇总_20260916.png"/>
+          <p:cNvPicPr>
+            <a:picLocks noChangeAspect="1"/>
+          </p:cNvPicPr>
+          <p:nvPr/>
+        </p:nvPicPr>
+        <p:blipFill>
+          <a:blip r:embed="rId3"/>
+          <a:stretch>
+            <a:fillRect/>
+          </a:stretch>
+        </p:blipFill>
+        <p:spPr>
+          <a:xfrm>
+            <a:off x="6233007" y="3522845"/>
+            <a:ext cx="5391759" cy="2710957"/>
+          </a:xfrm>
+          <a:prstGeom prst="rect">
+            <a:avLst/>
+          </a:prstGeom>
+        </p:spPr>
+      </p:pic>
+      <p:sp>
+        <p:nvSpPr>
+          <p:cNvPr id="7" name="TextBox 6"/>
           <p:cNvSpPr txBox="1"/>
           <p:nvPr/>
         </p:nvSpPr>
@@ -13124,7 +13193,7 @@
       </p:sp>
       <p:sp>
         <p:nvSpPr>
-          <p:cNvPr id="6" name="TextBox 5"/>
+          <p:cNvPr id="8" name="TextBox 7"/>
           <p:cNvSpPr txBox="1"/>
           <p:nvPr/>
         </p:nvSpPr>

--- a/ppt/out/课程设计_验收答辩.pptx
+++ b/ppt/out/课程设计_验收答辩.pptx
@@ -537,7 +537,7 @@
           <a:lstStyle/>
           <a:p>
             <a:r>
-              <a:t>时间：约 0.3 分钟。</a:t>
+              <a:t>时间：约 0.3 分钟。主讲：柯宁皓。</a:t>
             </a:r>
           </a:p>
         </p:txBody>
@@ -607,7 +607,7 @@
           <a:lstStyle/>
           <a:p>
             <a:r>
-              <a:t>时间：约 0.9 分钟。</a:t>
+              <a:t>时间：约 0.9 分钟。主讲：陈乔。</a:t>
             </a:r>
           </a:p>
         </p:txBody>
@@ -677,7 +677,7 @@
           <a:lstStyle/>
           <a:p>
             <a:r>
-              <a:t>时间：约 0.6 分钟。图：前递优先级波形。</a:t>
+              <a:t>时间：约 0.6 分钟。图：前递优先级波形。主讲：陈乔。</a:t>
             </a:r>
           </a:p>
         </p:txBody>
@@ -747,7 +747,7 @@
           <a:lstStyle/>
           <a:p>
             <a:r>
-              <a:t>时间：约 0.6 分钟。图：load-use 冻结波形。</a:t>
+              <a:t>时间：约 0.6 分钟。图：load-use 冻结波形。主讲：陈乔。</a:t>
             </a:r>
           </a:p>
         </p:txBody>
@@ -817,7 +817,7 @@
           <a:lstStyle/>
           <a:p>
             <a:r>
-              <a:t>时间：约 0.6 分钟。图：分支冲刷波形。</a:t>
+              <a:t>时间：约 0.6 分钟。图：分支冲刷波形。主讲：陈霆钧。</a:t>
             </a:r>
           </a:p>
         </p:txBody>
@@ -887,7 +887,7 @@
           <a:lstStyle/>
           <a:p>
             <a:r>
-              <a:t>时间：约 0.3 分钟。图：五级流水线运行总览波形。</a:t>
+              <a:t>时间：约 0.3 分钟。图：五级流水线运行总览波形。主讲：伍奕涛。</a:t>
             </a:r>
           </a:p>
         </p:txBody>
@@ -957,7 +957,7 @@
           <a:lstStyle/>
           <a:p>
             <a:r>
-              <a:t>时间：约 0.1 分钟。</a:t>
+              <a:t>时间：约 0.1 分钟。主讲：陈霆钧。</a:t>
             </a:r>
           </a:p>
         </p:txBody>
@@ -1027,7 +1027,7 @@
           <a:lstStyle/>
           <a:p>
             <a:r>
-              <a:t>时间：约 0.5 分钟。图：8N1 帧时序图与实测波形。</a:t>
+              <a:t>时间：约 0.5 分钟。图：8N1 帧时序图与实测波形。主讲：陈霆钧。</a:t>
             </a:r>
           </a:p>
         </p:txBody>
@@ -1097,7 +1097,7 @@
           <a:lstStyle/>
           <a:p>
             <a:r>
-              <a:t>时间：约 0.5 分钟。图：发送与接收状态机。</a:t>
+              <a:t>时间：约 0.5 分钟。图：发送与接收状态机。主讲：陈霆钧。</a:t>
             </a:r>
           </a:p>
         </p:txBody>
@@ -1167,7 +1167,7 @@
           <a:lstStyle/>
           <a:p>
             <a:r>
-              <a:t>时间：约 0.6 分钟。</a:t>
+              <a:t>时间：约 0.6 分钟。主讲：伍奕涛。</a:t>
             </a:r>
           </a:p>
         </p:txBody>
@@ -1237,7 +1237,7 @@
           <a:lstStyle/>
           <a:p>
             <a:r>
-              <a:t>时间：约 0.7 分钟。图：统一编址访问波形。</a:t>
+              <a:t>时间：约 0.7 分钟。图：统一编址访问波形。主讲：伍奕涛。</a:t>
             </a:r>
           </a:p>
         </p:txBody>
@@ -1307,7 +1307,7 @@
           <a:lstStyle/>
           <a:p>
             <a:r>
-              <a:t>时间：约 0.1 分钟。</a:t>
+              <a:t>时间：约 0.1 分钟。主讲：柯宁皓。</a:t>
             </a:r>
           </a:p>
         </p:txBody>
@@ -1377,7 +1377,7 @@
           <a:lstStyle/>
           <a:p>
             <a:r>
-              <a:t>时间：约 0.5 分钟。图：忙写丢弃波形。</a:t>
+              <a:t>时间：约 0.5 分钟。图：忙写丢弃波形。主讲：伍奕涛。</a:t>
             </a:r>
           </a:p>
         </p:txBody>
@@ -1447,7 +1447,7 @@
           <a:lstStyle/>
           <a:p>
             <a:r>
-              <a:t>时间：约 0.1 分钟。</a:t>
+              <a:t>时间：约 0.1 分钟。主讲：柯宁皓。</a:t>
             </a:r>
           </a:p>
         </p:txBody>
@@ -1517,7 +1517,7 @@
           <a:lstStyle/>
           <a:p>
             <a:r>
-              <a:t>时间：约 0.7 分钟。图：SoC 装配结构图。</a:t>
+              <a:t>时间：约 0.7 分钟。图：SoC 装配结构图。主讲：柯宁皓。</a:t>
             </a:r>
           </a:p>
         </p:txBody>
@@ -1587,7 +1587,7 @@
           <a:lstStyle/>
           <a:p>
             <a:r>
-              <a:t>时间：约 0.4 分钟。图：复位同步时序图。</a:t>
+              <a:t>时间：约 0.4 分钟。图：复位同步时序图。主讲：柯宁皓。</a:t>
             </a:r>
           </a:p>
         </p:txBody>
@@ -1657,7 +1657,7 @@
           <a:lstStyle/>
           <a:p>
             <a:r>
-              <a:t>时间：约 0.3 分钟。图：板级引脚图。</a:t>
+              <a:t>时间：约 0.3 分钟。图：板级引脚图。主讲：柯宁皓。</a:t>
             </a:r>
           </a:p>
         </p:txBody>
@@ -1727,7 +1727,7 @@
           <a:lstStyle/>
           <a:p>
             <a:r>
-              <a:t>时间：约 0.6 分钟。图：console 流程图。</a:t>
+              <a:t>时间：约 0.6 分钟。图：console 流程图。主讲：陈乔。</a:t>
             </a:r>
           </a:p>
         </p:txBody>
@@ -1797,7 +1797,7 @@
           <a:lstStyle/>
           <a:p>
             <a:r>
-              <a:t>时间：约 0.4 分钟。图：构建与烧录流程图。</a:t>
+              <a:t>时间：约 0.4 分钟。图：构建与烧录流程图。主讲：陈乔。</a:t>
             </a:r>
           </a:p>
         </p:txBody>
@@ -1867,7 +1867,7 @@
           <a:lstStyle/>
           <a:p>
             <a:r>
-              <a:t>时间：约 0.1 分钟。</a:t>
+              <a:t>时间：约 0.1 分钟。主讲：柯宁皓。</a:t>
             </a:r>
           </a:p>
         </p:txBody>
@@ -1937,7 +1937,7 @@
           <a:lstStyle/>
           <a:p>
             <a:r>
-              <a:t>时间：约 0.9 分钟。图：三层验证结构图。</a:t>
+              <a:t>时间：约 0.9 分钟。图：三层验证结构图。主讲：柯宁皓。</a:t>
             </a:r>
           </a:p>
         </p:txBody>
@@ -2007,7 +2007,7 @@
           <a:lstStyle/>
           <a:p>
             <a:r>
-              <a:t>时间：约 0.5 分钟。图：回归测试的运行输出与汇总结果。</a:t>
+              <a:t>时间：约 0.5 分钟。图：回归测试的运行输出与汇总结果。主讲：柯宁皓。</a:t>
             </a:r>
           </a:p>
         </p:txBody>
@@ -2077,7 +2077,7 @@
           <a:lstStyle/>
           <a:p>
             <a:r>
-              <a:t>时间：约 0.5 分钟。图：三层结构框图。</a:t>
+              <a:t>时间：约 0.5 分钟。图：三层结构框图。主讲：柯宁皓。</a:t>
             </a:r>
           </a:p>
         </p:txBody>
@@ -2147,7 +2147,7 @@
           <a:lstStyle/>
           <a:p>
             <a:r>
-              <a:t>时间：约 0.8 分钟。</a:t>
+              <a:t>时间：约 0.8 分钟。主讲：柯宁皓。</a:t>
             </a:r>
           </a:p>
         </p:txBody>
@@ -2217,7 +2217,7 @@
           <a:lstStyle/>
           <a:p>
             <a:r>
-              <a:t>时间：约 0.8 分钟。数据来源：pipeline/doc/perf_report.md 第 2.2 节。</a:t>
+              <a:t>时间：约 0.8 分钟。数据来源：pipeline/doc/perf_report.md 第 2.2 节。主讲：柯宁皓。</a:t>
             </a:r>
           </a:p>
         </p:txBody>
@@ -2287,7 +2287,7 @@
           <a:lstStyle/>
           <a:p>
             <a:r>
-              <a:t>时间：约 0.9 分钟。数据来源：pipeline/doc/perf_report.md 第 3、4 节。</a:t>
+              <a:t>时间：约 0.9 分钟。数据来源：pipeline/doc/perf_report.md 第 3、4 节。主讲：柯宁皓。</a:t>
             </a:r>
           </a:p>
         </p:txBody>
@@ -2357,7 +2357,7 @@
           <a:lstStyle/>
           <a:p>
             <a:r>
-              <a:t>时间：约 0.1 分钟。</a:t>
+              <a:t>时间：约 0.1 分钟。主讲：柯宁皓。</a:t>
             </a:r>
           </a:p>
         </p:txBody>
@@ -2427,7 +2427,7 @@
           <a:lstStyle/>
           <a:p>
             <a:r>
-              <a:t>时间：约 0.8 分钟。图：下板演示实拍（终端 banner 与回显）。演示前确认串口与板卡连接。</a:t>
+              <a:t>时间：约 0.8 分钟。图：下板演示实拍（终端 banner 与回显）。演示前确认串口与板卡连接。主讲：柯宁皓。</a:t>
             </a:r>
           </a:p>
         </p:txBody>
@@ -2497,7 +2497,7 @@
           <a:lstStyle/>
           <a:p>
             <a:r>
-              <a:t>时间：约 0.1 分钟。</a:t>
+              <a:t>时间：约 0.1 分钟。主讲：柯宁皓。</a:t>
             </a:r>
           </a:p>
         </p:txBody>
@@ -2567,7 +2567,7 @@
           <a:lstStyle/>
           <a:p>
             <a:r>
-              <a:t>时间：约 0.4 分钟。</a:t>
+              <a:t>时间：约 0.4 分钟。主讲：柯宁皓。</a:t>
             </a:r>
           </a:p>
         </p:txBody>
@@ -2637,7 +2637,7 @@
           <a:lstStyle/>
           <a:p>
             <a:r>
-              <a:t>时间：约 0.4 分钟。</a:t>
+              <a:t>时间：约 0.4 分钟。主讲：柯宁皓。</a:t>
             </a:r>
           </a:p>
         </p:txBody>
@@ -2707,7 +2707,7 @@
           <a:lstStyle/>
           <a:p>
             <a:r>
-              <a:t>时间：约 0.5 分钟。图：目录层次图。</a:t>
+              <a:t>时间：约 0.5 分钟。图：目录层次图。主讲：柯宁皓。</a:t>
             </a:r>
           </a:p>
         </p:txBody>
@@ -2777,7 +2777,12 @@
           <a:lstStyle/>
           <a:p>
             <a:r>
-              <a:t>时间：约 0.5 分钟。</a:t>
+              <a:t>时间：约 0.5 分钟。主讲：柯宁皓。讲者分工：1–6 柯宁皓；7、9、13、15–17 陈霆钧；</a:t>
+            </a:r>
+          </a:p>
+          <a:p>
+            <a:r>
+              <a:t>8、14、18–20 伍奕涛；10–12、25–26 陈乔；21–24、27–36 柯宁皓。</a:t>
             </a:r>
           </a:p>
         </p:txBody>
@@ -2847,7 +2852,7 @@
           <a:lstStyle/>
           <a:p>
             <a:r>
-              <a:t>时间：约 0.1 分钟。</a:t>
+              <a:t>时间：约 0.1 分钟。主讲：陈霆钧。</a:t>
             </a:r>
           </a:p>
         </p:txBody>
@@ -2917,7 +2922,7 @@
           <a:lstStyle/>
           <a:p>
             <a:r>
-              <a:t>时间：约 0.7 分钟。图：五级流水线结构框图。</a:t>
+              <a:t>时间：约 0.7 分钟。图：五级流水线结构框图。主讲：伍奕涛。</a:t>
             </a:r>
           </a:p>
         </p:txBody>
@@ -2987,7 +2992,7 @@
           <a:lstStyle/>
           <a:p>
             <a:r>
-              <a:t>时间：约 0.7 分钟。图：指令类别条数柱状图。</a:t>
+              <a:t>时间：约 0.7 分钟。图：指令类别条数柱状图。主讲：陈霆钧。</a:t>
             </a:r>
           </a:p>
         </p:txBody>
@@ -7744,7 +7749,7 @@
                 <a:ea typeface="Microsoft YaHei"/>
                 <a:cs typeface="Microsoft YaHei"/>
               </a:rPr>
-              <a:t>五级运行总览</a:t>
+              <a:t>五级流水线运行总览</a:t>
             </a:r>
           </a:p>
         </p:txBody>
@@ -7874,7 +7879,7 @@
                 <a:ea typeface="Microsoft YaHei"/>
                 <a:cs typeface="Microsoft YaHei"/>
               </a:rPr>
-              <a:t>波形可用于核对流水级的推进与段间寄存器的锁存关系。</a:t>
+              <a:t>波形展示了流水级的推进与段间寄存器的锁存关系。</a:t>
             </a:r>
           </a:p>
         </p:txBody>
@@ -16886,7 +16891,7 @@
         </p:nvGraphicFramePr>
         <p:xfrm>
           <a:off x="566928" y="3870959"/>
-          <a:ext cx="11057837" cy="1243584"/>
+          <a:ext cx="11057836" cy="1243584"/>
         </p:xfrm>
         <a:graphic>
           <a:graphicData uri="http://schemas.openxmlformats.org/drawingml/2006/table">
@@ -16895,12 +16900,12 @@
                 <a:tableStyleId>{5C22544A-7EE6-4342-B048-85BDC9FD1C3A}</a:tableStyleId>
               </a:tblPr>
               <a:tblGrid>
-                <a:gridCol w="870073"/>
-                <a:gridCol w="1581951"/>
-                <a:gridCol w="1645229"/>
-                <a:gridCol w="2515302"/>
-                <a:gridCol w="2863331"/>
-                <a:gridCol w="1581951"/>
+                <a:gridCol w="942429"/>
+                <a:gridCol w="1570715"/>
+                <a:gridCol w="1633544"/>
+                <a:gridCol w="2497438"/>
+                <a:gridCol w="2842995"/>
+                <a:gridCol w="1570715"/>
               </a:tblGrid>
               <a:tr h="310896">
                 <a:tc>
@@ -17692,7 +17697,7 @@
         </p:nvGraphicFramePr>
         <p:xfrm>
           <a:off x="566928" y="5224271"/>
-          <a:ext cx="11057836" cy="932688"/>
+          <a:ext cx="9487121" cy="932688"/>
         </p:xfrm>
         <a:graphic>
           <a:graphicData uri="http://schemas.openxmlformats.org/drawingml/2006/table">
@@ -17701,11 +17706,11 @@
                 <a:tableStyleId>{5C22544A-7EE6-4342-B048-85BDC9FD1C3A}</a:tableStyleId>
               </a:tblPr>
               <a:tblGrid>
-                <a:gridCol w="1858460"/>
-                <a:gridCol w="3066459"/>
-                <a:gridCol w="1703588"/>
-                <a:gridCol w="1362870"/>
-                <a:gridCol w="3066459"/>
+                <a:gridCol w="942429"/>
+                <a:gridCol w="1570715"/>
+                <a:gridCol w="1633544"/>
+                <a:gridCol w="2497438"/>
+                <a:gridCol w="2842995"/>
               </a:tblGrid>
               <a:tr h="310896">
                 <a:tc>
@@ -18926,13 +18931,145 @@
       <p:grpSpPr/>
       <p:sp>
         <p:nvSpPr>
-          <p:cNvPr id="2" name="TextBox 1"/>
+          <p:cNvPr id="2" name="Rectangle 1"/>
+          <p:cNvSpPr/>
+          <p:nvPr/>
+        </p:nvSpPr>
+        <p:spPr>
+          <a:xfrm>
+            <a:off x="0" y="0"/>
+            <a:ext cx="12191695" cy="6858000"/>
+          </a:xfrm>
+          <a:prstGeom prst="rect">
+            <a:avLst/>
+          </a:prstGeom>
+          <a:solidFill>
+            <a:srgbClr val="1F3A5F"/>
+          </a:solidFill>
+          <a:ln>
+            <a:noFill/>
+          </a:ln>
+          <a:effectLst/>
+        </p:spPr>
+        <p:style>
+          <a:lnRef idx="1">
+            <a:schemeClr val="accent1"/>
+          </a:lnRef>
+          <a:fillRef idx="3">
+            <a:schemeClr val="accent1"/>
+          </a:fillRef>
+          <a:effectRef idx="2">
+            <a:schemeClr val="accent1"/>
+          </a:effectRef>
+          <a:fontRef idx="minor">
+            <a:schemeClr val="lt1"/>
+          </a:fontRef>
+        </p:style>
+        <p:txBody>
+          <a:bodyPr rtlCol="0" anchor="ctr"/>
+          <a:lstStyle/>
+          <a:p>
+            <a:pPr algn="ctr"/>
+          </a:p>
+        </p:txBody>
+      </p:sp>
+      <p:sp>
+        <p:nvSpPr>
+          <p:cNvPr id="3" name="Rectangle 2"/>
+          <p:cNvSpPr/>
+          <p:nvPr/>
+        </p:nvSpPr>
+        <p:spPr>
+          <a:xfrm>
+            <a:off x="5272887" y="2880360"/>
+            <a:ext cx="1645920" cy="73152"/>
+          </a:xfrm>
+          <a:prstGeom prst="rect">
+            <a:avLst/>
+          </a:prstGeom>
+          <a:solidFill>
+            <a:srgbClr val="2E8B8B"/>
+          </a:solidFill>
+          <a:ln>
+            <a:noFill/>
+          </a:ln>
+          <a:effectLst/>
+        </p:spPr>
+        <p:style>
+          <a:lnRef idx="1">
+            <a:schemeClr val="accent1"/>
+          </a:lnRef>
+          <a:fillRef idx="3">
+            <a:schemeClr val="accent1"/>
+          </a:fillRef>
+          <a:effectRef idx="2">
+            <a:schemeClr val="accent1"/>
+          </a:effectRef>
+          <a:fontRef idx="minor">
+            <a:schemeClr val="lt1"/>
+          </a:fontRef>
+        </p:style>
+        <p:txBody>
+          <a:bodyPr rtlCol="0" anchor="ctr"/>
+          <a:lstStyle/>
+          <a:p>
+            <a:pPr algn="ctr"/>
+          </a:p>
+        </p:txBody>
+      </p:sp>
+      <p:sp>
+        <p:nvSpPr>
+          <p:cNvPr id="4" name="TextBox 3"/>
           <p:cNvSpPr txBox="1"/>
           <p:nvPr/>
         </p:nvSpPr>
         <p:spPr>
           <a:xfrm>
-            <a:off x="566928" y="914400"/>
+            <a:off x="566928" y="1783080"/>
+            <a:ext cx="11057839" cy="1005840"/>
+          </a:xfrm>
+          <a:prstGeom prst="rect">
+            <a:avLst/>
+          </a:prstGeom>
+          <a:noFill/>
+        </p:spPr>
+        <p:txBody>
+          <a:bodyPr wrap="square" lIns="0" rIns="0" tIns="0" bIns="0" anchor="ctr">
+            <a:spAutoFit/>
+          </a:bodyPr>
+          <a:lstStyle/>
+          <a:p>
+            <a:pPr algn="ctr">
+              <a:lnSpc>
+                <a:spcPct val="130000"/>
+              </a:lnSpc>
+              <a:spcAft>
+                <a:spcPts val="0"/>
+              </a:spcAft>
+            </a:pPr>
+            <a:r>
+              <a:rPr sz="5000" b="1">
+                <a:solidFill>
+                  <a:srgbClr val="FFFFFF"/>
+                </a:solidFill>
+                <a:latin typeface="Microsoft YaHei"/>
+                <a:ea typeface="Microsoft YaHei"/>
+                <a:cs typeface="Microsoft YaHei"/>
+              </a:rPr>
+              <a:t>致谢</a:t>
+            </a:r>
+          </a:p>
+        </p:txBody>
+      </p:sp>
+      <p:sp>
+        <p:nvSpPr>
+          <p:cNvPr id="5" name="TextBox 4"/>
+          <p:cNvSpPr txBox="1"/>
+          <p:nvPr/>
+        </p:nvSpPr>
+        <p:spPr>
+          <a:xfrm>
+            <a:off x="566928" y="3429000"/>
             <a:ext cx="11057839" cy="822960"/>
           </a:xfrm>
           <a:prstGeom prst="rect">
@@ -18946,7 +19083,7 @@
           </a:bodyPr>
           <a:lstStyle/>
           <a:p>
-            <a:pPr algn="l">
+            <a:pPr algn="ctr">
               <a:lnSpc>
                 <a:spcPct val="130000"/>
               </a:lnSpc>
@@ -18955,179 +19092,9 @@
               </a:spcAft>
             </a:pPr>
             <a:r>
-              <a:rPr sz="3000" b="1">
-                <a:solidFill>
-                  <a:srgbClr val="1F3A5F"/>
-                </a:solidFill>
-                <a:latin typeface="Microsoft YaHei"/>
-                <a:ea typeface="Microsoft YaHei"/>
-                <a:cs typeface="Microsoft YaHei"/>
-              </a:rPr>
-              <a:t>设计要点与致谢</a:t>
-            </a:r>
-          </a:p>
-        </p:txBody>
-      </p:sp>
-      <p:sp>
-        <p:nvSpPr>
-          <p:cNvPr id="3" name="TextBox 2"/>
-          <p:cNvSpPr txBox="1"/>
-          <p:nvPr/>
-        </p:nvSpPr>
-        <p:spPr>
-          <a:xfrm>
-            <a:off x="566928" y="1920240"/>
-            <a:ext cx="11057839" cy="2536698"/>
-          </a:xfrm>
-          <a:prstGeom prst="rect">
-            <a:avLst/>
-          </a:prstGeom>
-          <a:noFill/>
-        </p:spPr>
-        <p:txBody>
-          <a:bodyPr wrap="square" lIns="0" rIns="0" tIns="0" bIns="0">
-            <a:spAutoFit/>
-          </a:bodyPr>
-          <a:lstStyle/>
-          <a:p>
-            <a:pPr>
-              <a:lnSpc>
-                <a:spcPct val="130000"/>
-              </a:lnSpc>
-              <a:spcAft>
-                <a:spcPts val="500"/>
-              </a:spcAft>
-            </a:pPr>
-            <a:r>
-              <a:rPr sz="1700" b="0">
-                <a:solidFill>
-                  <a:srgbClr val="222222"/>
-                </a:solidFill>
-                <a:latin typeface="Microsoft YaHei"/>
-                <a:ea typeface="Microsoft YaHei"/>
-                <a:cs typeface="Microsoft YaHei"/>
-              </a:rPr>
-              <a:t>设计要点包括以下几项。</a:t>
-            </a:r>
-          </a:p>
-          <a:p>
-            <a:pPr>
-              <a:lnSpc>
-                <a:spcPct val="130000"/>
-              </a:lnSpc>
-              <a:spcAft>
-                <a:spcPts val="200"/>
-              </a:spcAft>
-            </a:pPr>
-            <a:r>
-              <a:rPr sz="1700" b="0">
-                <a:solidFill>
-                  <a:srgbClr val="222222"/>
-                </a:solidFill>
-                <a:latin typeface="Microsoft YaHei"/>
-                <a:ea typeface="Microsoft YaHei"/>
-                <a:cs typeface="Microsoft YaHei"/>
-              </a:rPr>
-              <a:t>• 整机使用单一时钟，位节拍由分频脉冲产生。</a:t>
-            </a:r>
-          </a:p>
-          <a:p>
-            <a:pPr>
-              <a:lnSpc>
-                <a:spcPct val="130000"/>
-              </a:lnSpc>
-              <a:spcAft>
-                <a:spcPts val="200"/>
-              </a:spcAft>
-            </a:pPr>
-            <a:r>
-              <a:rPr sz="1700" b="0">
-                <a:solidFill>
-                  <a:srgbClr val="222222"/>
-                </a:solidFill>
-                <a:latin typeface="Microsoft YaHei"/>
-                <a:ea typeface="Microsoft YaHei"/>
-                <a:cs typeface="Microsoft YaHei"/>
-              </a:rPr>
-              <a:t>• 外设采用统一编址，使用现有访存指令访问。</a:t>
-            </a:r>
-          </a:p>
-          <a:p>
-            <a:pPr>
-              <a:lnSpc>
-                <a:spcPct val="130000"/>
-              </a:lnSpc>
-              <a:spcAft>
-                <a:spcPts val="200"/>
-              </a:spcAft>
-            </a:pPr>
-            <a:r>
-              <a:rPr sz="1700" b="0">
-                <a:solidFill>
-                  <a:srgbClr val="222222"/>
-                </a:solidFill>
-                <a:latin typeface="Microsoft YaHei"/>
-                <a:ea typeface="Microsoft YaHei"/>
-                <a:cs typeface="Microsoft YaHei"/>
-              </a:rPr>
-              <a:t>• 存储容量参数化，仿真与下板使用不同容量。</a:t>
-            </a:r>
-          </a:p>
-          <a:p>
-            <a:pPr>
-              <a:lnSpc>
-                <a:spcPct val="130000"/>
-              </a:lnSpc>
-              <a:spcAft>
-                <a:spcPts val="200"/>
-              </a:spcAft>
-            </a:pPr>
-            <a:r>
-              <a:rPr sz="1700" b="0">
-                <a:solidFill>
-                  <a:srgbClr val="222222"/>
-                </a:solidFill>
-                <a:latin typeface="Microsoft YaHei"/>
-                <a:ea typeface="Microsoft YaHei"/>
-                <a:cs typeface="Microsoft YaHei"/>
-              </a:rPr>
-              <a:t>• 程序固化于指令存储器。</a:t>
-            </a:r>
-          </a:p>
-          <a:p>
-            <a:pPr>
-              <a:lnSpc>
-                <a:spcPct val="130000"/>
-              </a:lnSpc>
-              <a:spcAft>
-                <a:spcPts val="200"/>
-              </a:spcAft>
-            </a:pPr>
-            <a:r>
-              <a:rPr sz="1700" b="0">
-                <a:solidFill>
-                  <a:srgbClr val="222222"/>
-                </a:solidFill>
-                <a:latin typeface="Microsoft YaHei"/>
-                <a:ea typeface="Microsoft YaHei"/>
-                <a:cs typeface="Microsoft YaHei"/>
-              </a:rPr>
-              <a:t>• UART IP 不依赖宿主处理器，可以独立复用。</a:t>
-            </a:r>
-          </a:p>
-          <a:p>
-            <a:pPr>
-              <a:lnSpc>
-                <a:spcPct val="130000"/>
-              </a:lnSpc>
-              <a:spcAft>
-                <a:spcPts val="500"/>
-              </a:spcAft>
-            </a:pPr>
-            <a:r>
-              <a:rPr sz="1700" b="0">
-                <a:solidFill>
-                  <a:srgbClr val="222222"/>
+              <a:rPr sz="2800" b="0">
+                <a:solidFill>
+                  <a:srgbClr val="E8EEF4"/>
                 </a:solidFill>
                 <a:latin typeface="Microsoft YaHei"/>
                 <a:ea typeface="Microsoft YaHei"/>
@@ -19933,8 +19900,8 @@
                 <a:tableStyleId>{5C22544A-7EE6-4342-B048-85BDC9FD1C3A}</a:tableStyleId>
               </a:tblPr>
               <a:tblGrid>
-                <a:gridCol w="2024833"/>
-                <a:gridCol w="9033005"/>
+                <a:gridCol w="2196117"/>
+                <a:gridCol w="8861721"/>
               </a:tblGrid>
               <a:tr h="310896">
                 <a:tc>
@@ -20289,8 +20256,8 @@
                 <a:tableStyleId>{5C22544A-7EE6-4342-B048-85BDC9FD1C3A}</a:tableStyleId>
               </a:tblPr>
               <a:tblGrid>
-                <a:gridCol w="2415488"/>
-                <a:gridCol w="8642350"/>
+                <a:gridCol w="2196117"/>
+                <a:gridCol w="8861721"/>
               </a:tblGrid>
               <a:tr h="310896">
                 <a:tc>
